--- a/tools/goalmap/out/週次ゴール進捗_2026-W26.pptx
+++ b/tools/goalmap/out/週次ゴール進捗_2026-W26.pptx
@@ -3498,7 +3498,7 @@
                 <a:ea typeface="Hiragino Sans"/>
                 <a:cs typeface="Hiragino Sans"/>
               </a:rPr>
-              <a:t>20%</a:t>
+              <a:t>15%</a:t>
             </a:r>
           </a:p>
         </p:txBody>
@@ -3555,7 +3555,7 @@
         <p:spPr>
           <a:xfrm>
             <a:off x="8503920" y="2304288"/>
-            <a:ext cx="420624" cy="146304"/>
+            <a:ext cx="315468" cy="146304"/>
           </a:xfrm>
           <a:prstGeom prst="roundRect">
             <a:avLst/>
@@ -3732,7 +3732,7 @@
                 <a:ea typeface="Hiragino Sans"/>
                 <a:cs typeface="Hiragino Sans"/>
               </a:rPr>
-              <a:t>42%</a:t>
+              <a:t>15%</a:t>
             </a:r>
           </a:p>
         </p:txBody>
@@ -3789,7 +3789,7 @@
         <p:spPr>
           <a:xfrm>
             <a:off x="8503920" y="2871216"/>
-            <a:ext cx="883310" cy="146304"/>
+            <a:ext cx="315468" cy="146304"/>
           </a:xfrm>
           <a:prstGeom prst="roundRect">
             <a:avLst/>
@@ -3880,7 +3880,7 @@
       </p:sp>
       <p:pic>
         <p:nvPicPr>
-          <p:cNvPr id="3" name="Picture 2" descr="tmpd82mt7eu.png"/>
+          <p:cNvPr id="3" name="Picture 2" descr="tmpb414pkld.png"/>
           <p:cNvPicPr>
             <a:picLocks noChangeAspect="1"/>
           </p:cNvPicPr>
@@ -3895,7 +3895,7 @@
         <p:spPr>
           <a:xfrm>
             <a:off x="457200" y="960120"/>
-            <a:ext cx="6277708" cy="5760720"/>
+            <a:ext cx="5777713" cy="5760720"/>
           </a:xfrm>
           <a:prstGeom prst="rect">
             <a:avLst/>
@@ -3971,7 +3971,7 @@
                 <a:ea typeface="Hiragino Sans"/>
                 <a:cs typeface="Hiragino Sans"/>
               </a:rPr>
-              <a:t>20%</a:t>
+              <a:t>15%</a:t>
             </a:r>
           </a:p>
         </p:txBody>
@@ -4028,7 +4028,7 @@
         <p:spPr>
           <a:xfrm>
             <a:off x="8138160" y="1920240"/>
-            <a:ext cx="713232" cy="146304"/>
+            <a:ext cx="534924" cy="146304"/>
           </a:xfrm>
           <a:prstGeom prst="roundRect">
             <a:avLst/>
@@ -4136,7 +4136,7 @@
                 <a:ea typeface="Hiragino Sans"/>
                 <a:cs typeface="Hiragino Sans"/>
               </a:rPr>
-              <a:t>苦手ケースの切り返しをロープレで固める</a:t>
+              <a:t>苦手ケースの切り返しをロープレで固める（②練習・進行中）</a:t>
             </a:r>
           </a:p>
           <a:p>
@@ -4164,7 +4164,7 @@
                 <a:ea typeface="Hiragino Sans"/>
                 <a:cs typeface="Hiragino Sans"/>
               </a:rPr>
-              <a:t>今週中に苦手パターン3つの切り返しを用意</a:t>
+              <a:t>③実践へ：商談前に型の要点を確認する</a:t>
             </a:r>
           </a:p>
         </p:txBody>
@@ -4226,7 +4226,7 @@
       </p:sp>
       <p:pic>
         <p:nvPicPr>
-          <p:cNvPr id="3" name="Picture 2" descr="tmpduck3zoz.png"/>
+          <p:cNvPr id="3" name="Picture 2" descr="tmppbht4xir.png"/>
           <p:cNvPicPr>
             <a:picLocks noChangeAspect="1"/>
           </p:cNvPicPr>
@@ -4241,7 +4241,7 @@
         <p:spPr>
           <a:xfrm>
             <a:off x="457200" y="960120"/>
-            <a:ext cx="5935287" cy="5760720"/>
+            <a:ext cx="5777713" cy="5760720"/>
           </a:xfrm>
           <a:prstGeom prst="rect">
             <a:avLst/>
@@ -4317,7 +4317,7 @@
                 <a:ea typeface="Hiragino Sans"/>
                 <a:cs typeface="Hiragino Sans"/>
               </a:rPr>
-              <a:t>42%</a:t>
+              <a:t>15%</a:t>
             </a:r>
           </a:p>
         </p:txBody>
@@ -4374,7 +4374,7 @@
         <p:spPr>
           <a:xfrm>
             <a:off x="8138160" y="1920240"/>
-            <a:ext cx="1497787" cy="146304"/>
+            <a:ext cx="534924" cy="146304"/>
           </a:xfrm>
           <a:prstGeom prst="roundRect">
             <a:avLst/>
@@ -4482,7 +4482,7 @@
                 <a:ea typeface="Hiragino Sans"/>
                 <a:cs typeface="Hiragino Sans"/>
               </a:rPr>
-              <a:t>苦手ケースの切り返しをロープレで固める</a:t>
+              <a:t>苦手ケースの切り返しをロープレで固める（②練習・進行中）</a:t>
             </a:r>
           </a:p>
           <a:p>
@@ -4510,7 +4510,7 @@
                 <a:ea typeface="Hiragino Sans"/>
                 <a:cs typeface="Hiragino Sans"/>
               </a:rPr>
-              <a:t>今週中に苦手パターン3つの切り返しを用意</a:t>
+              <a:t>③実践へ：商談前に型の要点を確認する</a:t>
             </a:r>
           </a:p>
         </p:txBody>

--- a/tools/goalmap/out/週次ゴール進捗_2026-W26.pptx
+++ b/tools/goalmap/out/週次ゴール進捗_2026-W26.pptx
@@ -3202,7 +3202,7 @@
                 <a:ea typeface="Hiragino Sans"/>
                 <a:cs typeface="Hiragino Sans"/>
               </a:rPr>
-              <a:t>2026-W26 ／ 2026-06-24 ／ 対象 2名</a:t>
+              <a:t>2026-W26 ／ 2026-06-25 ／ 対象 2名</a:t>
             </a:r>
           </a:p>
         </p:txBody>
@@ -3498,7 +3498,7 @@
                 <a:ea typeface="Hiragino Sans"/>
                 <a:cs typeface="Hiragino Sans"/>
               </a:rPr>
-              <a:t>15%</a:t>
+              <a:t>20%</a:t>
             </a:r>
           </a:p>
         </p:txBody>
@@ -3555,7 +3555,7 @@
         <p:spPr>
           <a:xfrm>
             <a:off x="8503920" y="2304288"/>
-            <a:ext cx="315468" cy="146304"/>
+            <a:ext cx="420624" cy="146304"/>
           </a:xfrm>
           <a:prstGeom prst="roundRect">
             <a:avLst/>
@@ -3880,7 +3880,7 @@
       </p:sp>
       <p:pic>
         <p:nvPicPr>
-          <p:cNvPr id="3" name="Picture 2" descr="tmpb414pkld.png"/>
+          <p:cNvPr id="3" name="Picture 2" descr="tmprhk3z2yj.png"/>
           <p:cNvPicPr>
             <a:picLocks noChangeAspect="1"/>
           </p:cNvPicPr>
@@ -3895,7 +3895,7 @@
         <p:spPr>
           <a:xfrm>
             <a:off x="457200" y="960120"/>
-            <a:ext cx="5777713" cy="5760720"/>
+            <a:ext cx="6277708" cy="5760720"/>
           </a:xfrm>
           <a:prstGeom prst="rect">
             <a:avLst/>
@@ -3971,7 +3971,7 @@
                 <a:ea typeface="Hiragino Sans"/>
                 <a:cs typeface="Hiragino Sans"/>
               </a:rPr>
-              <a:t>15%</a:t>
+              <a:t>20%</a:t>
             </a:r>
           </a:p>
         </p:txBody>
@@ -4028,7 +4028,7 @@
         <p:spPr>
           <a:xfrm>
             <a:off x="8138160" y="1920240"/>
-            <a:ext cx="534924" cy="146304"/>
+            <a:ext cx="713232" cy="146304"/>
           </a:xfrm>
           <a:prstGeom prst="roundRect">
             <a:avLst/>
@@ -4226,7 +4226,7 @@
       </p:sp>
       <p:pic>
         <p:nvPicPr>
-          <p:cNvPr id="3" name="Picture 2" descr="tmppbht4xir.png"/>
+          <p:cNvPr id="3" name="Picture 2" descr="tmpwlid3ngd.png"/>
           <p:cNvPicPr>
             <a:picLocks noChangeAspect="1"/>
           </p:cNvPicPr>

--- a/tools/goalmap/out/週次ゴール進捗_2026-W26.pptx
+++ b/tools/goalmap/out/週次ゴール進捗_2026-W26.pptx
@@ -3695,7 +3695,7 @@
                 <a:ea typeface="Hiragino Sans"/>
                 <a:cs typeface="Hiragino Sans"/>
               </a:rPr>
-              <a:t>②練習</a:t>
+              <a:t>③実践</a:t>
             </a:r>
           </a:p>
         </p:txBody>
@@ -3732,7 +3732,7 @@
                 <a:ea typeface="Hiragino Sans"/>
                 <a:cs typeface="Hiragino Sans"/>
               </a:rPr>
-              <a:t>15%</a:t>
+              <a:t>31%</a:t>
             </a:r>
           </a:p>
         </p:txBody>
@@ -3789,7 +3789,7 @@
         <p:spPr>
           <a:xfrm>
             <a:off x="8503920" y="2871216"/>
-            <a:ext cx="315468" cy="146304"/>
+            <a:ext cx="651967" cy="146304"/>
           </a:xfrm>
           <a:prstGeom prst="roundRect">
             <a:avLst/>
@@ -3880,7 +3880,7 @@
       </p:sp>
       <p:pic>
         <p:nvPicPr>
-          <p:cNvPr id="3" name="Picture 2" descr="tmprhk3z2yj.png"/>
+          <p:cNvPr id="3" name="Picture 2" descr="tmpzh8416rr.png"/>
           <p:cNvPicPr>
             <a:picLocks noChangeAspect="1"/>
           </p:cNvPicPr>
@@ -4226,7 +4226,7 @@
       </p:sp>
       <p:pic>
         <p:nvPicPr>
-          <p:cNvPr id="3" name="Picture 2" descr="tmpwlid3ngd.png"/>
+          <p:cNvPr id="3" name="Picture 2" descr="tmp3os7f7_p.png"/>
           <p:cNvPicPr>
             <a:picLocks noChangeAspect="1"/>
           </p:cNvPicPr>
@@ -4317,7 +4317,7 @@
                 <a:ea typeface="Hiragino Sans"/>
                 <a:cs typeface="Hiragino Sans"/>
               </a:rPr>
-              <a:t>15%</a:t>
+              <a:t>31%</a:t>
             </a:r>
           </a:p>
         </p:txBody>
@@ -4374,7 +4374,7 @@
         <p:spPr>
           <a:xfrm>
             <a:off x="8138160" y="1920240"/>
-            <a:ext cx="534924" cy="146304"/>
+            <a:ext cx="1105509" cy="146304"/>
           </a:xfrm>
           <a:prstGeom prst="roundRect">
             <a:avLst/>
@@ -4482,7 +4482,7 @@
                 <a:ea typeface="Hiragino Sans"/>
                 <a:cs typeface="Hiragino Sans"/>
               </a:rPr>
-              <a:t>苦手ケースの切り返しをロープレで固める（②練習・進行中）</a:t>
+              <a:t>商談で型を意図的に使い、手応えを毎回メモする（③実践）</a:t>
             </a:r>
           </a:p>
           <a:p>
@@ -4510,7 +4510,7 @@
                 <a:ea typeface="Hiragino Sans"/>
                 <a:cs typeface="Hiragino Sans"/>
               </a:rPr>
-              <a:t>③実践へ：商談前に型の要点を確認する</a:t>
+              <a:t>ネック処理を1商談で意図的に試す</a:t>
             </a:r>
           </a:p>
         </p:txBody>

--- a/tools/goalmap/out/週次ゴール進捗_2026-W26.pptx
+++ b/tools/goalmap/out/週次ゴール進捗_2026-W26.pptx
@@ -3695,7 +3695,7 @@
                 <a:ea typeface="Hiragino Sans"/>
                 <a:cs typeface="Hiragino Sans"/>
               </a:rPr>
-              <a:t>③実践</a:t>
+              <a:t>②練習</a:t>
             </a:r>
           </a:p>
         </p:txBody>
@@ -3732,7 +3732,7 @@
                 <a:ea typeface="Hiragino Sans"/>
                 <a:cs typeface="Hiragino Sans"/>
               </a:rPr>
-              <a:t>31%</a:t>
+              <a:t>15%</a:t>
             </a:r>
           </a:p>
         </p:txBody>
@@ -3789,7 +3789,7 @@
         <p:spPr>
           <a:xfrm>
             <a:off x="8503920" y="2871216"/>
-            <a:ext cx="651967" cy="146304"/>
+            <a:ext cx="315468" cy="146304"/>
           </a:xfrm>
           <a:prstGeom prst="roundRect">
             <a:avLst/>
@@ -3880,7 +3880,7 @@
       </p:sp>
       <p:pic>
         <p:nvPicPr>
-          <p:cNvPr id="3" name="Picture 2" descr="tmpzh8416rr.png"/>
+          <p:cNvPr id="3" name="Picture 2" descr="tmp0gg3bb3f.png"/>
           <p:cNvPicPr>
             <a:picLocks noChangeAspect="1"/>
           </p:cNvPicPr>
@@ -4226,7 +4226,7 @@
       </p:sp>
       <p:pic>
         <p:nvPicPr>
-          <p:cNvPr id="3" name="Picture 2" descr="tmp3os7f7_p.png"/>
+          <p:cNvPr id="3" name="Picture 2" descr="tmpvjk3cg5l.png"/>
           <p:cNvPicPr>
             <a:picLocks noChangeAspect="1"/>
           </p:cNvPicPr>
@@ -4317,7 +4317,7 @@
                 <a:ea typeface="Hiragino Sans"/>
                 <a:cs typeface="Hiragino Sans"/>
               </a:rPr>
-              <a:t>31%</a:t>
+              <a:t>15%</a:t>
             </a:r>
           </a:p>
         </p:txBody>
@@ -4374,7 +4374,7 @@
         <p:spPr>
           <a:xfrm>
             <a:off x="8138160" y="1920240"/>
-            <a:ext cx="1105509" cy="146304"/>
+            <a:ext cx="534924" cy="146304"/>
           </a:xfrm>
           <a:prstGeom prst="roundRect">
             <a:avLst/>
@@ -4482,7 +4482,7 @@
                 <a:ea typeface="Hiragino Sans"/>
                 <a:cs typeface="Hiragino Sans"/>
               </a:rPr>
-              <a:t>商談で型を意図的に使い、手応えを毎回メモする（③実践）</a:t>
+              <a:t>苦手ケースの切り返しをロープレで固める（②練習・進行中）</a:t>
             </a:r>
           </a:p>
           <a:p>
@@ -4510,7 +4510,7 @@
                 <a:ea typeface="Hiragino Sans"/>
                 <a:cs typeface="Hiragino Sans"/>
               </a:rPr>
-              <a:t>ネック処理を1商談で意図的に試す</a:t>
+              <a:t>③実践へ：商談前に型の要点を確認する</a:t>
             </a:r>
           </a:p>
         </p:txBody>

--- a/tools/goalmap/out/週次ゴール進捗_2026-W26.pptx
+++ b/tools/goalmap/out/週次ゴール進捗_2026-W26.pptx
@@ -3202,7 +3202,7 @@
                 <a:ea typeface="Hiragino Sans"/>
                 <a:cs typeface="Hiragino Sans"/>
               </a:rPr>
-              <a:t>2026-W26 ／ 2026-06-25 ／ 対象 2名</a:t>
+              <a:t>2026-W26 ／ 2026-06-26 ／ 対象 2名</a:t>
             </a:r>
           </a:p>
         </p:txBody>
@@ -3880,7 +3880,7 @@
       </p:sp>
       <p:pic>
         <p:nvPicPr>
-          <p:cNvPr id="3" name="Picture 2" descr="tmp0gg3bb3f.png"/>
+          <p:cNvPr id="3" name="Picture 2" descr="tmp_qpchduv.png"/>
           <p:cNvPicPr>
             <a:picLocks noChangeAspect="1"/>
           </p:cNvPicPr>
@@ -4226,7 +4226,7 @@
       </p:sp>
       <p:pic>
         <p:nvPicPr>
-          <p:cNvPr id="3" name="Picture 2" descr="tmpvjk3cg5l.png"/>
+          <p:cNvPr id="3" name="Picture 2" descr="tmpbbvj9sjy.png"/>
           <p:cNvPicPr>
             <a:picLocks noChangeAspect="1"/>
           </p:cNvPicPr>

--- a/tools/goalmap/out/週次ゴール進捗_2026-W26.pptx
+++ b/tools/goalmap/out/週次ゴール進捗_2026-W26.pptx
@@ -3880,7 +3880,7 @@
       </p:sp>
       <p:pic>
         <p:nvPicPr>
-          <p:cNvPr id="3" name="Picture 2" descr="tmp_qpchduv.png"/>
+          <p:cNvPr id="3" name="Picture 2" descr="tmp6t6ql_3x.png"/>
           <p:cNvPicPr>
             <a:picLocks noChangeAspect="1"/>
           </p:cNvPicPr>
@@ -4226,7 +4226,7 @@
       </p:sp>
       <p:pic>
         <p:nvPicPr>
-          <p:cNvPr id="3" name="Picture 2" descr="tmpbbvj9sjy.png"/>
+          <p:cNvPr id="3" name="Picture 2" descr="tmpsjv2ymh7.png"/>
           <p:cNvPicPr>
             <a:picLocks noChangeAspect="1"/>
           </p:cNvPicPr>

--- a/tools/goalmap/out/週次ゴール進捗_2026-W26.pptx
+++ b/tools/goalmap/out/週次ゴール進捗_2026-W26.pptx
@@ -3880,7 +3880,7 @@
       </p:sp>
       <p:pic>
         <p:nvPicPr>
-          <p:cNvPr id="3" name="Picture 2" descr="tmp6t6ql_3x.png"/>
+          <p:cNvPr id="3" name="Picture 2" descr="tmp6sqizv3e.png"/>
           <p:cNvPicPr>
             <a:picLocks noChangeAspect="1"/>
           </p:cNvPicPr>
@@ -4226,7 +4226,7 @@
       </p:sp>
       <p:pic>
         <p:nvPicPr>
-          <p:cNvPr id="3" name="Picture 2" descr="tmpsjv2ymh7.png"/>
+          <p:cNvPr id="3" name="Picture 2" descr="tmp0j4dd5ns.png"/>
           <p:cNvPicPr>
             <a:picLocks noChangeAspect="1"/>
           </p:cNvPicPr>

--- a/tools/goalmap/out/週次ゴール進捗_2026-W26.pptx
+++ b/tools/goalmap/out/週次ゴール進捗_2026-W26.pptx
@@ -3880,7 +3880,7 @@
       </p:sp>
       <p:pic>
         <p:nvPicPr>
-          <p:cNvPr id="3" name="Picture 2" descr="tmp6sqizv3e.png"/>
+          <p:cNvPr id="3" name="Picture 2" descr="tmpk0u12c9b.png"/>
           <p:cNvPicPr>
             <a:picLocks noChangeAspect="1"/>
           </p:cNvPicPr>
@@ -4226,7 +4226,7 @@
       </p:sp>
       <p:pic>
         <p:nvPicPr>
-          <p:cNvPr id="3" name="Picture 2" descr="tmp0j4dd5ns.png"/>
+          <p:cNvPr id="3" name="Picture 2" descr="tmpm30nng5b.png"/>
           <p:cNvPicPr>
             <a:picLocks noChangeAspect="1"/>
           </p:cNvPicPr>

--- a/tools/goalmap/out/週次ゴール進捗_2026-W26.pptx
+++ b/tools/goalmap/out/週次ゴール進捗_2026-W26.pptx
@@ -3880,7 +3880,7 @@
       </p:sp>
       <p:pic>
         <p:nvPicPr>
-          <p:cNvPr id="3" name="Picture 2" descr="tmpk0u12c9b.png"/>
+          <p:cNvPr id="3" name="Picture 2" descr="tmpdx_j2q1g.png"/>
           <p:cNvPicPr>
             <a:picLocks noChangeAspect="1"/>
           </p:cNvPicPr>
@@ -4226,7 +4226,7 @@
       </p:sp>
       <p:pic>
         <p:nvPicPr>
-          <p:cNvPr id="3" name="Picture 2" descr="tmpm30nng5b.png"/>
+          <p:cNvPr id="3" name="Picture 2" descr="tmp1_ff12sx.png"/>
           <p:cNvPicPr>
             <a:picLocks noChangeAspect="1"/>
           </p:cNvPicPr>

--- a/tools/goalmap/out/週次ゴール進捗_2026-W26.pptx
+++ b/tools/goalmap/out/週次ゴール進捗_2026-W26.pptx
@@ -3880,7 +3880,7 @@
       </p:sp>
       <p:pic>
         <p:nvPicPr>
-          <p:cNvPr id="3" name="Picture 2" descr="tmpdx_j2q1g.png"/>
+          <p:cNvPr id="3" name="Picture 2" descr="tmpwfyewnse.png"/>
           <p:cNvPicPr>
             <a:picLocks noChangeAspect="1"/>
           </p:cNvPicPr>
@@ -4226,7 +4226,7 @@
       </p:sp>
       <p:pic>
         <p:nvPicPr>
-          <p:cNvPr id="3" name="Picture 2" descr="tmp1_ff12sx.png"/>
+          <p:cNvPr id="3" name="Picture 2" descr="tmpbgm172vm.png"/>
           <p:cNvPicPr>
             <a:picLocks noChangeAspect="1"/>
           </p:cNvPicPr>

--- a/tools/goalmap/out/週次ゴール進捗_2026-W26.pptx
+++ b/tools/goalmap/out/週次ゴール進捗_2026-W26.pptx
@@ -8,6 +8,11 @@
     <p:sldId id="256" r:id="rId7"/>
     <p:sldId id="257" r:id="rId8"/>
     <p:sldId id="258" r:id="rId9"/>
+    <p:sldId id="259" r:id="rId10"/>
+    <p:sldId id="260" r:id="rId11"/>
+    <p:sldId id="261" r:id="rId12"/>
+    <p:sldId id="262" r:id="rId13"/>
+    <p:sldId id="263" r:id="rId14"/>
   </p:sldIdLst>
   <p:sldSz cx="12191695" cy="6858000" type="screen4x3"/>
   <p:notesSz cx="6858000" cy="9144000"/>
@@ -3202,7 +3207,7 @@
                 <a:ea typeface="Hiragino Sans"/>
                 <a:cs typeface="Hiragino Sans"/>
               </a:rPr>
-              <a:t>2026-W26 ／ 2026-06-26 ／ 対象 2名</a:t>
+              <a:t>2026-W26 ／ 2026-06-26 ／ 対象 7名</a:t>
             </a:r>
           </a:p>
         </p:txBody>
@@ -3387,7 +3392,7 @@
                 <a:ea typeface="Hiragino Sans"/>
                 <a:cs typeface="Hiragino Sans"/>
               </a:rPr>
-              <a:t>宮腰</a:t>
+              <a:t>三浦</a:t>
             </a:r>
           </a:p>
         </p:txBody>
@@ -3461,7 +3466,7 @@
                 <a:ea typeface="Hiragino Sans"/>
                 <a:cs typeface="Hiragino Sans"/>
               </a:rPr>
-              <a:t>②練習</a:t>
+              <a:t>①型を知る</a:t>
             </a:r>
           </a:p>
         </p:txBody>
@@ -3498,7 +3503,7 @@
                 <a:ea typeface="Hiragino Sans"/>
                 <a:cs typeface="Hiragino Sans"/>
               </a:rPr>
-              <a:t>20%</a:t>
+              <a:t>0%</a:t>
             </a:r>
           </a:p>
         </p:txBody>
@@ -3548,20 +3553,168 @@
       </p:sp>
       <p:sp>
         <p:nvSpPr>
-          <p:cNvPr id="14" name="Rounded Rectangle 13"/>
+          <p:cNvPr id="14" name="TextBox 13"/>
+          <p:cNvSpPr txBox="1"/>
+          <p:nvPr/>
+        </p:nvSpPr>
+        <p:spPr>
+          <a:xfrm>
+            <a:off x="548640" y="2761488"/>
+            <a:ext cx="2743200" cy="365760"/>
+          </a:xfrm>
+          <a:prstGeom prst="rect">
+            <a:avLst/>
+          </a:prstGeom>
+          <a:noFill/>
+        </p:spPr>
+        <p:txBody>
+          <a:bodyPr wrap="square" anchor="t">
+            <a:spAutoFit/>
+          </a:bodyPr>
+          <a:lstStyle/>
+          <a:p>
+            <a:pPr algn="l"/>
+            <a:r>
+              <a:rPr sz="1400" b="1">
+                <a:solidFill>
+                  <a:srgbClr val="1F2933"/>
+                </a:solidFill>
+                <a:latin typeface="Hiragino Sans"/>
+                <a:ea typeface="Hiragino Sans"/>
+                <a:cs typeface="Hiragino Sans"/>
+              </a:rPr>
+              <a:t>今川</a:t>
+            </a:r>
+          </a:p>
+        </p:txBody>
+      </p:sp>
+      <p:sp>
+        <p:nvSpPr>
+          <p:cNvPr id="15" name="TextBox 14"/>
+          <p:cNvSpPr txBox="1"/>
+          <p:nvPr/>
+        </p:nvSpPr>
+        <p:spPr>
+          <a:xfrm>
+            <a:off x="3291840" y="2761488"/>
+            <a:ext cx="3291840" cy="365760"/>
+          </a:xfrm>
+          <a:prstGeom prst="rect">
+            <a:avLst/>
+          </a:prstGeom>
+          <a:noFill/>
+        </p:spPr>
+        <p:txBody>
+          <a:bodyPr wrap="square" anchor="t">
+            <a:spAutoFit/>
+          </a:bodyPr>
+          <a:lstStyle/>
+          <a:p>
+            <a:pPr algn="l"/>
+            <a:r>
+              <a:rPr sz="1100" b="0">
+                <a:solidFill>
+                  <a:srgbClr val="1F2933"/>
+                </a:solidFill>
+                <a:latin typeface="Hiragino Sans"/>
+                <a:ea typeface="Hiragino Sans"/>
+                <a:cs typeface="Hiragino Sans"/>
+              </a:rPr>
+              <a:t>チームの成約を仕組み化する（マネジメント）</a:t>
+            </a:r>
+          </a:p>
+        </p:txBody>
+      </p:sp>
+      <p:sp>
+        <p:nvSpPr>
+          <p:cNvPr id="16" name="TextBox 15"/>
+          <p:cNvSpPr txBox="1"/>
+          <p:nvPr/>
+        </p:nvSpPr>
+        <p:spPr>
+          <a:xfrm>
+            <a:off x="6583680" y="2761488"/>
+            <a:ext cx="1828800" cy="365760"/>
+          </a:xfrm>
+          <a:prstGeom prst="rect">
+            <a:avLst/>
+          </a:prstGeom>
+          <a:noFill/>
+        </p:spPr>
+        <p:txBody>
+          <a:bodyPr wrap="square" anchor="t">
+            <a:spAutoFit/>
+          </a:bodyPr>
+          <a:lstStyle/>
+          <a:p>
+            <a:pPr algn="l"/>
+            <a:r>
+              <a:rPr sz="1100" b="1">
+                <a:solidFill>
+                  <a:srgbClr val="EF9F27"/>
+                </a:solidFill>
+                <a:latin typeface="Hiragino Sans"/>
+                <a:ea typeface="Hiragino Sans"/>
+                <a:cs typeface="Hiragino Sans"/>
+              </a:rPr>
+              <a:t>①型を知る</a:t>
+            </a:r>
+          </a:p>
+        </p:txBody>
+      </p:sp>
+      <p:sp>
+        <p:nvSpPr>
+          <p:cNvPr id="17" name="TextBox 16"/>
+          <p:cNvSpPr txBox="1"/>
+          <p:nvPr/>
+        </p:nvSpPr>
+        <p:spPr>
+          <a:xfrm>
+            <a:off x="10698480" y="2743200"/>
+            <a:ext cx="914400" cy="365760"/>
+          </a:xfrm>
+          <a:prstGeom prst="rect">
+            <a:avLst/>
+          </a:prstGeom>
+          <a:noFill/>
+        </p:spPr>
+        <p:txBody>
+          <a:bodyPr wrap="square" anchor="t">
+            <a:spAutoFit/>
+          </a:bodyPr>
+          <a:lstStyle/>
+          <a:p>
+            <a:pPr algn="l"/>
+            <a:r>
+              <a:rPr sz="1300" b="1">
+                <a:solidFill>
+                  <a:srgbClr val="1D9E75"/>
+                </a:solidFill>
+                <a:latin typeface="Hiragino Sans"/>
+                <a:ea typeface="Hiragino Sans"/>
+                <a:cs typeface="Hiragino Sans"/>
+              </a:rPr>
+              <a:t>0%</a:t>
+            </a:r>
+          </a:p>
+        </p:txBody>
+      </p:sp>
+      <p:sp>
+        <p:nvSpPr>
+          <p:cNvPr id="18" name="Rounded Rectangle 17"/>
           <p:cNvSpPr/>
           <p:nvPr/>
         </p:nvSpPr>
         <p:spPr>
           <a:xfrm>
-            <a:off x="8503920" y="2304288"/>
-            <a:ext cx="420624" cy="146304"/>
+            <a:off x="8503920" y="2871216"/>
+            <a:ext cx="2103120" cy="146304"/>
           </a:xfrm>
           <a:prstGeom prst="roundRect">
             <a:avLst/>
           </a:prstGeom>
           <a:solidFill>
-            <a:srgbClr val="1D9E75"/>
+            <a:srgbClr val="F2F4F6"/>
           </a:solidFill>
           <a:ln>
             <a:noFill/>
@@ -3591,13 +3744,13 @@
       </p:sp>
       <p:sp>
         <p:nvSpPr>
-          <p:cNvPr id="15" name="TextBox 14"/>
+          <p:cNvPr id="19" name="TextBox 18"/>
           <p:cNvSpPr txBox="1"/>
           <p:nvPr/>
         </p:nvSpPr>
         <p:spPr>
           <a:xfrm>
-            <a:off x="548640" y="2761488"/>
+            <a:off x="548640" y="3328416"/>
             <a:ext cx="2743200" cy="365760"/>
           </a:xfrm>
           <a:prstGeom prst="rect">
@@ -3621,20 +3774,20 @@
                 <a:ea typeface="Hiragino Sans"/>
                 <a:cs typeface="Hiragino Sans"/>
               </a:rPr>
-              <a:t>岡野</a:t>
-            </a:r>
-          </a:p>
-        </p:txBody>
-      </p:sp>
-      <p:sp>
-        <p:nvSpPr>
-          <p:cNvPr id="16" name="TextBox 15"/>
+              <a:t>宮腰</a:t>
+            </a:r>
+          </a:p>
+        </p:txBody>
+      </p:sp>
+      <p:sp>
+        <p:nvSpPr>
+          <p:cNvPr id="20" name="TextBox 19"/>
           <p:cNvSpPr txBox="1"/>
           <p:nvPr/>
         </p:nvSpPr>
         <p:spPr>
           <a:xfrm>
-            <a:off x="3291840" y="2761488"/>
+            <a:off x="3291840" y="3328416"/>
             <a:ext cx="3291840" cy="365760"/>
           </a:xfrm>
           <a:prstGeom prst="rect">
@@ -3665,13 +3818,13 @@
       </p:sp>
       <p:sp>
         <p:nvSpPr>
-          <p:cNvPr id="17" name="TextBox 16"/>
+          <p:cNvPr id="21" name="TextBox 20"/>
           <p:cNvSpPr txBox="1"/>
           <p:nvPr/>
         </p:nvSpPr>
         <p:spPr>
           <a:xfrm>
-            <a:off x="6583680" y="2761488"/>
+            <a:off x="6583680" y="3328416"/>
             <a:ext cx="1828800" cy="365760"/>
           </a:xfrm>
           <a:prstGeom prst="rect">
@@ -3702,13 +3855,13 @@
       </p:sp>
       <p:sp>
         <p:nvSpPr>
-          <p:cNvPr id="18" name="TextBox 17"/>
+          <p:cNvPr id="22" name="TextBox 21"/>
           <p:cNvSpPr txBox="1"/>
           <p:nvPr/>
         </p:nvSpPr>
         <p:spPr>
           <a:xfrm>
-            <a:off x="10698480" y="2743200"/>
+            <a:off x="10698480" y="3310128"/>
             <a:ext cx="914400" cy="365760"/>
           </a:xfrm>
           <a:prstGeom prst="rect">
@@ -3732,20 +3885,20 @@
                 <a:ea typeface="Hiragino Sans"/>
                 <a:cs typeface="Hiragino Sans"/>
               </a:rPr>
-              <a:t>15%</a:t>
-            </a:r>
-          </a:p>
-        </p:txBody>
-      </p:sp>
-      <p:sp>
-        <p:nvSpPr>
-          <p:cNvPr id="19" name="Rounded Rectangle 18"/>
+              <a:t>20%</a:t>
+            </a:r>
+          </a:p>
+        </p:txBody>
+      </p:sp>
+      <p:sp>
+        <p:nvSpPr>
+          <p:cNvPr id="23" name="Rounded Rectangle 22"/>
           <p:cNvSpPr/>
           <p:nvPr/>
         </p:nvSpPr>
         <p:spPr>
           <a:xfrm>
-            <a:off x="8503920" y="2871216"/>
+            <a:off x="8503920" y="3438144"/>
             <a:ext cx="2103120" cy="146304"/>
           </a:xfrm>
           <a:prstGeom prst="roundRect">
@@ -3782,20 +3935,827 @@
       </p:sp>
       <p:sp>
         <p:nvSpPr>
-          <p:cNvPr id="20" name="Rounded Rectangle 19"/>
+          <p:cNvPr id="24" name="Rounded Rectangle 23"/>
           <p:cNvSpPr/>
           <p:nvPr/>
         </p:nvSpPr>
         <p:spPr>
           <a:xfrm>
-            <a:off x="8503920" y="2871216"/>
-            <a:ext cx="315468" cy="146304"/>
+            <a:off x="8503920" y="3438144"/>
+            <a:ext cx="420624" cy="146304"/>
           </a:xfrm>
           <a:prstGeom prst="roundRect">
             <a:avLst/>
           </a:prstGeom>
           <a:solidFill>
             <a:srgbClr val="1D9E75"/>
+          </a:solidFill>
+          <a:ln>
+            <a:noFill/>
+          </a:ln>
+        </p:spPr>
+        <p:style>
+          <a:lnRef idx="1">
+            <a:schemeClr val="accent1"/>
+          </a:lnRef>
+          <a:fillRef idx="3">
+            <a:schemeClr val="accent1"/>
+          </a:fillRef>
+          <a:effectRef idx="2">
+            <a:schemeClr val="accent1"/>
+          </a:effectRef>
+          <a:fontRef idx="minor">
+            <a:schemeClr val="lt1"/>
+          </a:fontRef>
+        </p:style>
+        <p:txBody>
+          <a:bodyPr rtlCol="0" anchor="ctr"/>
+          <a:lstStyle/>
+          <a:p>
+            <a:pPr algn="ctr"/>
+          </a:p>
+        </p:txBody>
+      </p:sp>
+      <p:sp>
+        <p:nvSpPr>
+          <p:cNvPr id="25" name="TextBox 24"/>
+          <p:cNvSpPr txBox="1"/>
+          <p:nvPr/>
+        </p:nvSpPr>
+        <p:spPr>
+          <a:xfrm>
+            <a:off x="548640" y="3895344"/>
+            <a:ext cx="2743200" cy="365760"/>
+          </a:xfrm>
+          <a:prstGeom prst="rect">
+            <a:avLst/>
+          </a:prstGeom>
+          <a:noFill/>
+        </p:spPr>
+        <p:txBody>
+          <a:bodyPr wrap="square" anchor="t">
+            <a:spAutoFit/>
+          </a:bodyPr>
+          <a:lstStyle/>
+          <a:p>
+            <a:pPr algn="l"/>
+            <a:r>
+              <a:rPr sz="1400" b="1">
+                <a:solidFill>
+                  <a:srgbClr val="1F2933"/>
+                </a:solidFill>
+                <a:latin typeface="Hiragino Sans"/>
+                <a:ea typeface="Hiragino Sans"/>
+                <a:cs typeface="Hiragino Sans"/>
+              </a:rPr>
+              <a:t>岡野</a:t>
+            </a:r>
+          </a:p>
+        </p:txBody>
+      </p:sp>
+      <p:sp>
+        <p:nvSpPr>
+          <p:cNvPr id="26" name="TextBox 25"/>
+          <p:cNvSpPr txBox="1"/>
+          <p:nvPr/>
+        </p:nvSpPr>
+        <p:spPr>
+          <a:xfrm>
+            <a:off x="3291840" y="3895344"/>
+            <a:ext cx="3291840" cy="365760"/>
+          </a:xfrm>
+          <a:prstGeom prst="rect">
+            <a:avLst/>
+          </a:prstGeom>
+          <a:noFill/>
+        </p:spPr>
+        <p:txBody>
+          <a:bodyPr wrap="square" anchor="t">
+            <a:spAutoFit/>
+          </a:bodyPr>
+          <a:lstStyle/>
+          <a:p>
+            <a:pPr algn="l"/>
+            <a:r>
+              <a:rPr sz="1100" b="0">
+                <a:solidFill>
+                  <a:srgbClr val="1F2933"/>
+                </a:solidFill>
+                <a:latin typeface="Hiragino Sans"/>
+                <a:ea typeface="Hiragino Sans"/>
+                <a:cs typeface="Hiragino Sans"/>
+              </a:rPr>
+              <a:t>契約を安定させる（クローザー）</a:t>
+            </a:r>
+          </a:p>
+        </p:txBody>
+      </p:sp>
+      <p:sp>
+        <p:nvSpPr>
+          <p:cNvPr id="27" name="TextBox 26"/>
+          <p:cNvSpPr txBox="1"/>
+          <p:nvPr/>
+        </p:nvSpPr>
+        <p:spPr>
+          <a:xfrm>
+            <a:off x="6583680" y="3895344"/>
+            <a:ext cx="1828800" cy="365760"/>
+          </a:xfrm>
+          <a:prstGeom prst="rect">
+            <a:avLst/>
+          </a:prstGeom>
+          <a:noFill/>
+        </p:spPr>
+        <p:txBody>
+          <a:bodyPr wrap="square" anchor="t">
+            <a:spAutoFit/>
+          </a:bodyPr>
+          <a:lstStyle/>
+          <a:p>
+            <a:pPr algn="l"/>
+            <a:r>
+              <a:rPr sz="1100" b="1">
+                <a:solidFill>
+                  <a:srgbClr val="EF9F27"/>
+                </a:solidFill>
+                <a:latin typeface="Hiragino Sans"/>
+                <a:ea typeface="Hiragino Sans"/>
+                <a:cs typeface="Hiragino Sans"/>
+              </a:rPr>
+              <a:t>②練習</a:t>
+            </a:r>
+          </a:p>
+        </p:txBody>
+      </p:sp>
+      <p:sp>
+        <p:nvSpPr>
+          <p:cNvPr id="28" name="TextBox 27"/>
+          <p:cNvSpPr txBox="1"/>
+          <p:nvPr/>
+        </p:nvSpPr>
+        <p:spPr>
+          <a:xfrm>
+            <a:off x="10698480" y="3877056"/>
+            <a:ext cx="914400" cy="365760"/>
+          </a:xfrm>
+          <a:prstGeom prst="rect">
+            <a:avLst/>
+          </a:prstGeom>
+          <a:noFill/>
+        </p:spPr>
+        <p:txBody>
+          <a:bodyPr wrap="square" anchor="t">
+            <a:spAutoFit/>
+          </a:bodyPr>
+          <a:lstStyle/>
+          <a:p>
+            <a:pPr algn="l"/>
+            <a:r>
+              <a:rPr sz="1300" b="1">
+                <a:solidFill>
+                  <a:srgbClr val="1D9E75"/>
+                </a:solidFill>
+                <a:latin typeface="Hiragino Sans"/>
+                <a:ea typeface="Hiragino Sans"/>
+                <a:cs typeface="Hiragino Sans"/>
+              </a:rPr>
+              <a:t>15%</a:t>
+            </a:r>
+          </a:p>
+        </p:txBody>
+      </p:sp>
+      <p:sp>
+        <p:nvSpPr>
+          <p:cNvPr id="29" name="Rounded Rectangle 28"/>
+          <p:cNvSpPr/>
+          <p:nvPr/>
+        </p:nvSpPr>
+        <p:spPr>
+          <a:xfrm>
+            <a:off x="8503920" y="4005072"/>
+            <a:ext cx="2103120" cy="146304"/>
+          </a:xfrm>
+          <a:prstGeom prst="roundRect">
+            <a:avLst/>
+          </a:prstGeom>
+          <a:solidFill>
+            <a:srgbClr val="F2F4F6"/>
+          </a:solidFill>
+          <a:ln>
+            <a:noFill/>
+          </a:ln>
+        </p:spPr>
+        <p:style>
+          <a:lnRef idx="1">
+            <a:schemeClr val="accent1"/>
+          </a:lnRef>
+          <a:fillRef idx="3">
+            <a:schemeClr val="accent1"/>
+          </a:fillRef>
+          <a:effectRef idx="2">
+            <a:schemeClr val="accent1"/>
+          </a:effectRef>
+          <a:fontRef idx="minor">
+            <a:schemeClr val="lt1"/>
+          </a:fontRef>
+        </p:style>
+        <p:txBody>
+          <a:bodyPr rtlCol="0" anchor="ctr"/>
+          <a:lstStyle/>
+          <a:p>
+            <a:pPr algn="ctr"/>
+          </a:p>
+        </p:txBody>
+      </p:sp>
+      <p:sp>
+        <p:nvSpPr>
+          <p:cNvPr id="30" name="Rounded Rectangle 29"/>
+          <p:cNvSpPr/>
+          <p:nvPr/>
+        </p:nvSpPr>
+        <p:spPr>
+          <a:xfrm>
+            <a:off x="8503920" y="4005072"/>
+            <a:ext cx="315468" cy="146304"/>
+          </a:xfrm>
+          <a:prstGeom prst="roundRect">
+            <a:avLst/>
+          </a:prstGeom>
+          <a:solidFill>
+            <a:srgbClr val="1D9E75"/>
+          </a:solidFill>
+          <a:ln>
+            <a:noFill/>
+          </a:ln>
+        </p:spPr>
+        <p:style>
+          <a:lnRef idx="1">
+            <a:schemeClr val="accent1"/>
+          </a:lnRef>
+          <a:fillRef idx="3">
+            <a:schemeClr val="accent1"/>
+          </a:fillRef>
+          <a:effectRef idx="2">
+            <a:schemeClr val="accent1"/>
+          </a:effectRef>
+          <a:fontRef idx="minor">
+            <a:schemeClr val="lt1"/>
+          </a:fontRef>
+        </p:style>
+        <p:txBody>
+          <a:bodyPr rtlCol="0" anchor="ctr"/>
+          <a:lstStyle/>
+          <a:p>
+            <a:pPr algn="ctr"/>
+          </a:p>
+        </p:txBody>
+      </p:sp>
+      <p:sp>
+        <p:nvSpPr>
+          <p:cNvPr id="31" name="TextBox 30"/>
+          <p:cNvSpPr txBox="1"/>
+          <p:nvPr/>
+        </p:nvSpPr>
+        <p:spPr>
+          <a:xfrm>
+            <a:off x="548640" y="4462272"/>
+            <a:ext cx="2743200" cy="365760"/>
+          </a:xfrm>
+          <a:prstGeom prst="rect">
+            <a:avLst/>
+          </a:prstGeom>
+          <a:noFill/>
+        </p:spPr>
+        <p:txBody>
+          <a:bodyPr wrap="square" anchor="t">
+            <a:spAutoFit/>
+          </a:bodyPr>
+          <a:lstStyle/>
+          <a:p>
+            <a:pPr algn="l"/>
+            <a:r>
+              <a:rPr sz="1400" b="1">
+                <a:solidFill>
+                  <a:srgbClr val="1F2933"/>
+                </a:solidFill>
+                <a:latin typeface="Hiragino Sans"/>
+                <a:ea typeface="Hiragino Sans"/>
+                <a:cs typeface="Hiragino Sans"/>
+              </a:rPr>
+              <a:t>戸田</a:t>
+            </a:r>
+          </a:p>
+        </p:txBody>
+      </p:sp>
+      <p:sp>
+        <p:nvSpPr>
+          <p:cNvPr id="32" name="TextBox 31"/>
+          <p:cNvSpPr txBox="1"/>
+          <p:nvPr/>
+        </p:nvSpPr>
+        <p:spPr>
+          <a:xfrm>
+            <a:off x="3291840" y="4462272"/>
+            <a:ext cx="3291840" cy="365760"/>
+          </a:xfrm>
+          <a:prstGeom prst="rect">
+            <a:avLst/>
+          </a:prstGeom>
+          <a:noFill/>
+        </p:spPr>
+        <p:txBody>
+          <a:bodyPr wrap="square" anchor="t">
+            <a:spAutoFit/>
+          </a:bodyPr>
+          <a:lstStyle/>
+          <a:p>
+            <a:pPr algn="l"/>
+            <a:r>
+              <a:rPr sz="1100" b="0">
+                <a:solidFill>
+                  <a:srgbClr val="1F2933"/>
+                </a:solidFill>
+                <a:latin typeface="Hiragino Sans"/>
+                <a:ea typeface="Hiragino Sans"/>
+                <a:cs typeface="Hiragino Sans"/>
+              </a:rPr>
+              <a:t>契約を安定させる（クローザー）</a:t>
+            </a:r>
+          </a:p>
+        </p:txBody>
+      </p:sp>
+      <p:sp>
+        <p:nvSpPr>
+          <p:cNvPr id="33" name="TextBox 32"/>
+          <p:cNvSpPr txBox="1"/>
+          <p:nvPr/>
+        </p:nvSpPr>
+        <p:spPr>
+          <a:xfrm>
+            <a:off x="6583680" y="4462272"/>
+            <a:ext cx="1828800" cy="365760"/>
+          </a:xfrm>
+          <a:prstGeom prst="rect">
+            <a:avLst/>
+          </a:prstGeom>
+          <a:noFill/>
+        </p:spPr>
+        <p:txBody>
+          <a:bodyPr wrap="square" anchor="t">
+            <a:spAutoFit/>
+          </a:bodyPr>
+          <a:lstStyle/>
+          <a:p>
+            <a:pPr algn="l"/>
+            <a:r>
+              <a:rPr sz="1100" b="1">
+                <a:solidFill>
+                  <a:srgbClr val="EF9F27"/>
+                </a:solidFill>
+                <a:latin typeface="Hiragino Sans"/>
+                <a:ea typeface="Hiragino Sans"/>
+                <a:cs typeface="Hiragino Sans"/>
+              </a:rPr>
+              <a:t>①型を知る</a:t>
+            </a:r>
+          </a:p>
+        </p:txBody>
+      </p:sp>
+      <p:sp>
+        <p:nvSpPr>
+          <p:cNvPr id="34" name="TextBox 33"/>
+          <p:cNvSpPr txBox="1"/>
+          <p:nvPr/>
+        </p:nvSpPr>
+        <p:spPr>
+          <a:xfrm>
+            <a:off x="10698480" y="4443984"/>
+            <a:ext cx="914400" cy="365760"/>
+          </a:xfrm>
+          <a:prstGeom prst="rect">
+            <a:avLst/>
+          </a:prstGeom>
+          <a:noFill/>
+        </p:spPr>
+        <p:txBody>
+          <a:bodyPr wrap="square" anchor="t">
+            <a:spAutoFit/>
+          </a:bodyPr>
+          <a:lstStyle/>
+          <a:p>
+            <a:pPr algn="l"/>
+            <a:r>
+              <a:rPr sz="1300" b="1">
+                <a:solidFill>
+                  <a:srgbClr val="1D9E75"/>
+                </a:solidFill>
+                <a:latin typeface="Hiragino Sans"/>
+                <a:ea typeface="Hiragino Sans"/>
+                <a:cs typeface="Hiragino Sans"/>
+              </a:rPr>
+              <a:t>0%</a:t>
+            </a:r>
+          </a:p>
+        </p:txBody>
+      </p:sp>
+      <p:sp>
+        <p:nvSpPr>
+          <p:cNvPr id="35" name="Rounded Rectangle 34"/>
+          <p:cNvSpPr/>
+          <p:nvPr/>
+        </p:nvSpPr>
+        <p:spPr>
+          <a:xfrm>
+            <a:off x="8503920" y="4572000"/>
+            <a:ext cx="2103120" cy="146304"/>
+          </a:xfrm>
+          <a:prstGeom prst="roundRect">
+            <a:avLst/>
+          </a:prstGeom>
+          <a:solidFill>
+            <a:srgbClr val="F2F4F6"/>
+          </a:solidFill>
+          <a:ln>
+            <a:noFill/>
+          </a:ln>
+        </p:spPr>
+        <p:style>
+          <a:lnRef idx="1">
+            <a:schemeClr val="accent1"/>
+          </a:lnRef>
+          <a:fillRef idx="3">
+            <a:schemeClr val="accent1"/>
+          </a:fillRef>
+          <a:effectRef idx="2">
+            <a:schemeClr val="accent1"/>
+          </a:effectRef>
+          <a:fontRef idx="minor">
+            <a:schemeClr val="lt1"/>
+          </a:fontRef>
+        </p:style>
+        <p:txBody>
+          <a:bodyPr rtlCol="0" anchor="ctr"/>
+          <a:lstStyle/>
+          <a:p>
+            <a:pPr algn="ctr"/>
+          </a:p>
+        </p:txBody>
+      </p:sp>
+      <p:sp>
+        <p:nvSpPr>
+          <p:cNvPr id="36" name="TextBox 35"/>
+          <p:cNvSpPr txBox="1"/>
+          <p:nvPr/>
+        </p:nvSpPr>
+        <p:spPr>
+          <a:xfrm>
+            <a:off x="548640" y="5029200"/>
+            <a:ext cx="2743200" cy="365760"/>
+          </a:xfrm>
+          <a:prstGeom prst="rect">
+            <a:avLst/>
+          </a:prstGeom>
+          <a:noFill/>
+        </p:spPr>
+        <p:txBody>
+          <a:bodyPr wrap="square" anchor="t">
+            <a:spAutoFit/>
+          </a:bodyPr>
+          <a:lstStyle/>
+          <a:p>
+            <a:pPr algn="l"/>
+            <a:r>
+              <a:rPr sz="1400" b="1">
+                <a:solidFill>
+                  <a:srgbClr val="1F2933"/>
+                </a:solidFill>
+                <a:latin typeface="Hiragino Sans"/>
+                <a:ea typeface="Hiragino Sans"/>
+                <a:cs typeface="Hiragino Sans"/>
+              </a:rPr>
+              <a:t>藤江</a:t>
+            </a:r>
+          </a:p>
+        </p:txBody>
+      </p:sp>
+      <p:sp>
+        <p:nvSpPr>
+          <p:cNvPr id="37" name="TextBox 36"/>
+          <p:cNvSpPr txBox="1"/>
+          <p:nvPr/>
+        </p:nvSpPr>
+        <p:spPr>
+          <a:xfrm>
+            <a:off x="3291840" y="5029200"/>
+            <a:ext cx="3291840" cy="365760"/>
+          </a:xfrm>
+          <a:prstGeom prst="rect">
+            <a:avLst/>
+          </a:prstGeom>
+          <a:noFill/>
+        </p:spPr>
+        <p:txBody>
+          <a:bodyPr wrap="square" anchor="t">
+            <a:spAutoFit/>
+          </a:bodyPr>
+          <a:lstStyle/>
+          <a:p>
+            <a:pPr algn="l"/>
+            <a:r>
+              <a:rPr sz="1100" b="0">
+                <a:solidFill>
+                  <a:srgbClr val="1F2933"/>
+                </a:solidFill>
+                <a:latin typeface="Hiragino Sans"/>
+                <a:ea typeface="Hiragino Sans"/>
+                <a:cs typeface="Hiragino Sans"/>
+              </a:rPr>
+              <a:t>契約を安定させる（クローザー）</a:t>
+            </a:r>
+          </a:p>
+        </p:txBody>
+      </p:sp>
+      <p:sp>
+        <p:nvSpPr>
+          <p:cNvPr id="38" name="TextBox 37"/>
+          <p:cNvSpPr txBox="1"/>
+          <p:nvPr/>
+        </p:nvSpPr>
+        <p:spPr>
+          <a:xfrm>
+            <a:off x="6583680" y="5029200"/>
+            <a:ext cx="1828800" cy="365760"/>
+          </a:xfrm>
+          <a:prstGeom prst="rect">
+            <a:avLst/>
+          </a:prstGeom>
+          <a:noFill/>
+        </p:spPr>
+        <p:txBody>
+          <a:bodyPr wrap="square" anchor="t">
+            <a:spAutoFit/>
+          </a:bodyPr>
+          <a:lstStyle/>
+          <a:p>
+            <a:pPr algn="l"/>
+            <a:r>
+              <a:rPr sz="1100" b="1">
+                <a:solidFill>
+                  <a:srgbClr val="EF9F27"/>
+                </a:solidFill>
+                <a:latin typeface="Hiragino Sans"/>
+                <a:ea typeface="Hiragino Sans"/>
+                <a:cs typeface="Hiragino Sans"/>
+              </a:rPr>
+              <a:t>①型を知る</a:t>
+            </a:r>
+          </a:p>
+        </p:txBody>
+      </p:sp>
+      <p:sp>
+        <p:nvSpPr>
+          <p:cNvPr id="39" name="TextBox 38"/>
+          <p:cNvSpPr txBox="1"/>
+          <p:nvPr/>
+        </p:nvSpPr>
+        <p:spPr>
+          <a:xfrm>
+            <a:off x="10698480" y="5010912"/>
+            <a:ext cx="914400" cy="365760"/>
+          </a:xfrm>
+          <a:prstGeom prst="rect">
+            <a:avLst/>
+          </a:prstGeom>
+          <a:noFill/>
+        </p:spPr>
+        <p:txBody>
+          <a:bodyPr wrap="square" anchor="t">
+            <a:spAutoFit/>
+          </a:bodyPr>
+          <a:lstStyle/>
+          <a:p>
+            <a:pPr algn="l"/>
+            <a:r>
+              <a:rPr sz="1300" b="1">
+                <a:solidFill>
+                  <a:srgbClr val="1D9E75"/>
+                </a:solidFill>
+                <a:latin typeface="Hiragino Sans"/>
+                <a:ea typeface="Hiragino Sans"/>
+                <a:cs typeface="Hiragino Sans"/>
+              </a:rPr>
+              <a:t>0%</a:t>
+            </a:r>
+          </a:p>
+        </p:txBody>
+      </p:sp>
+      <p:sp>
+        <p:nvSpPr>
+          <p:cNvPr id="40" name="Rounded Rectangle 39"/>
+          <p:cNvSpPr/>
+          <p:nvPr/>
+        </p:nvSpPr>
+        <p:spPr>
+          <a:xfrm>
+            <a:off x="8503920" y="5138928"/>
+            <a:ext cx="2103120" cy="146304"/>
+          </a:xfrm>
+          <a:prstGeom prst="roundRect">
+            <a:avLst/>
+          </a:prstGeom>
+          <a:solidFill>
+            <a:srgbClr val="F2F4F6"/>
+          </a:solidFill>
+          <a:ln>
+            <a:noFill/>
+          </a:ln>
+        </p:spPr>
+        <p:style>
+          <a:lnRef idx="1">
+            <a:schemeClr val="accent1"/>
+          </a:lnRef>
+          <a:fillRef idx="3">
+            <a:schemeClr val="accent1"/>
+          </a:fillRef>
+          <a:effectRef idx="2">
+            <a:schemeClr val="accent1"/>
+          </a:effectRef>
+          <a:fontRef idx="minor">
+            <a:schemeClr val="lt1"/>
+          </a:fontRef>
+        </p:style>
+        <p:txBody>
+          <a:bodyPr rtlCol="0" anchor="ctr"/>
+          <a:lstStyle/>
+          <a:p>
+            <a:pPr algn="ctr"/>
+          </a:p>
+        </p:txBody>
+      </p:sp>
+      <p:sp>
+        <p:nvSpPr>
+          <p:cNvPr id="41" name="TextBox 40"/>
+          <p:cNvSpPr txBox="1"/>
+          <p:nvPr/>
+        </p:nvSpPr>
+        <p:spPr>
+          <a:xfrm>
+            <a:off x="548640" y="5596128"/>
+            <a:ext cx="2743200" cy="365760"/>
+          </a:xfrm>
+          <a:prstGeom prst="rect">
+            <a:avLst/>
+          </a:prstGeom>
+          <a:noFill/>
+        </p:spPr>
+        <p:txBody>
+          <a:bodyPr wrap="square" anchor="t">
+            <a:spAutoFit/>
+          </a:bodyPr>
+          <a:lstStyle/>
+          <a:p>
+            <a:pPr algn="l"/>
+            <a:r>
+              <a:rPr sz="1400" b="1">
+                <a:solidFill>
+                  <a:srgbClr val="1F2933"/>
+                </a:solidFill>
+                <a:latin typeface="Hiragino Sans"/>
+                <a:ea typeface="Hiragino Sans"/>
+                <a:cs typeface="Hiragino Sans"/>
+              </a:rPr>
+              <a:t>門田</a:t>
+            </a:r>
+          </a:p>
+        </p:txBody>
+      </p:sp>
+      <p:sp>
+        <p:nvSpPr>
+          <p:cNvPr id="42" name="TextBox 41"/>
+          <p:cNvSpPr txBox="1"/>
+          <p:nvPr/>
+        </p:nvSpPr>
+        <p:spPr>
+          <a:xfrm>
+            <a:off x="3291840" y="5596128"/>
+            <a:ext cx="3291840" cy="365760"/>
+          </a:xfrm>
+          <a:prstGeom prst="rect">
+            <a:avLst/>
+          </a:prstGeom>
+          <a:noFill/>
+        </p:spPr>
+        <p:txBody>
+          <a:bodyPr wrap="square" anchor="t">
+            <a:spAutoFit/>
+          </a:bodyPr>
+          <a:lstStyle/>
+          <a:p>
+            <a:pPr algn="l"/>
+            <a:r>
+              <a:rPr sz="1100" b="0">
+                <a:solidFill>
+                  <a:srgbClr val="1F2933"/>
+                </a:solidFill>
+                <a:latin typeface="Hiragino Sans"/>
+                <a:ea typeface="Hiragino Sans"/>
+                <a:cs typeface="Hiragino Sans"/>
+              </a:rPr>
+              <a:t>契約を安定させる（クローザー）</a:t>
+            </a:r>
+          </a:p>
+        </p:txBody>
+      </p:sp>
+      <p:sp>
+        <p:nvSpPr>
+          <p:cNvPr id="43" name="TextBox 42"/>
+          <p:cNvSpPr txBox="1"/>
+          <p:nvPr/>
+        </p:nvSpPr>
+        <p:spPr>
+          <a:xfrm>
+            <a:off x="6583680" y="5596128"/>
+            <a:ext cx="1828800" cy="365760"/>
+          </a:xfrm>
+          <a:prstGeom prst="rect">
+            <a:avLst/>
+          </a:prstGeom>
+          <a:noFill/>
+        </p:spPr>
+        <p:txBody>
+          <a:bodyPr wrap="square" anchor="t">
+            <a:spAutoFit/>
+          </a:bodyPr>
+          <a:lstStyle/>
+          <a:p>
+            <a:pPr algn="l"/>
+            <a:r>
+              <a:rPr sz="1100" b="1">
+                <a:solidFill>
+                  <a:srgbClr val="EF9F27"/>
+                </a:solidFill>
+                <a:latin typeface="Hiragino Sans"/>
+                <a:ea typeface="Hiragino Sans"/>
+                <a:cs typeface="Hiragino Sans"/>
+              </a:rPr>
+              <a:t>①型を知る</a:t>
+            </a:r>
+          </a:p>
+        </p:txBody>
+      </p:sp>
+      <p:sp>
+        <p:nvSpPr>
+          <p:cNvPr id="44" name="TextBox 43"/>
+          <p:cNvSpPr txBox="1"/>
+          <p:nvPr/>
+        </p:nvSpPr>
+        <p:spPr>
+          <a:xfrm>
+            <a:off x="10698480" y="5577840"/>
+            <a:ext cx="914400" cy="365760"/>
+          </a:xfrm>
+          <a:prstGeom prst="rect">
+            <a:avLst/>
+          </a:prstGeom>
+          <a:noFill/>
+        </p:spPr>
+        <p:txBody>
+          <a:bodyPr wrap="square" anchor="t">
+            <a:spAutoFit/>
+          </a:bodyPr>
+          <a:lstStyle/>
+          <a:p>
+            <a:pPr algn="l"/>
+            <a:r>
+              <a:rPr sz="1300" b="1">
+                <a:solidFill>
+                  <a:srgbClr val="1D9E75"/>
+                </a:solidFill>
+                <a:latin typeface="Hiragino Sans"/>
+                <a:ea typeface="Hiragino Sans"/>
+                <a:cs typeface="Hiragino Sans"/>
+              </a:rPr>
+              <a:t>0%</a:t>
+            </a:r>
+          </a:p>
+        </p:txBody>
+      </p:sp>
+      <p:sp>
+        <p:nvSpPr>
+          <p:cNvPr id="45" name="Rounded Rectangle 44"/>
+          <p:cNvSpPr/>
+          <p:nvPr/>
+        </p:nvSpPr>
+        <p:spPr>
+          <a:xfrm>
+            <a:off x="8503920" y="5705856"/>
+            <a:ext cx="2103120" cy="146304"/>
+          </a:xfrm>
+          <a:prstGeom prst="roundRect">
+            <a:avLst/>
+          </a:prstGeom>
+          <a:solidFill>
+            <a:srgbClr val="F2F4F6"/>
           </a:solidFill>
           <a:ln>
             <a:noFill/>
@@ -3873,14 +4833,14 @@
                 <a:ea typeface="Hiragino Sans"/>
                 <a:cs typeface="Hiragino Sans"/>
               </a:rPr>
-              <a:t>宮腰（wanny・戸田指導）｜契約を安定させる（クローザー）</a:t>
+              <a:t>三浦（ピタサチ・営業）｜契約を安定させる（クローザー）</a:t>
             </a:r>
           </a:p>
         </p:txBody>
       </p:sp>
       <p:pic>
         <p:nvPicPr>
-          <p:cNvPr id="3" name="Picture 2" descr="tmpwfyewnse.png"/>
+          <p:cNvPr id="3" name="Picture 2" descr="tmpratnvufy.png"/>
           <p:cNvPicPr>
             <a:picLocks noChangeAspect="1"/>
           </p:cNvPicPr>
@@ -3971,7 +4931,7 @@
                 <a:ea typeface="Hiragino Sans"/>
                 <a:cs typeface="Hiragino Sans"/>
               </a:rPr>
-              <a:t>20%</a:t>
+              <a:t>0%</a:t>
             </a:r>
           </a:p>
         </p:txBody>
@@ -4021,50 +4981,7 @@
       </p:sp>
       <p:sp>
         <p:nvSpPr>
-          <p:cNvPr id="7" name="Rounded Rectangle 6"/>
-          <p:cNvSpPr/>
-          <p:nvPr/>
-        </p:nvSpPr>
-        <p:spPr>
-          <a:xfrm>
-            <a:off x="8138160" y="1920240"/>
-            <a:ext cx="713232" cy="146304"/>
-          </a:xfrm>
-          <a:prstGeom prst="roundRect">
-            <a:avLst/>
-          </a:prstGeom>
-          <a:solidFill>
-            <a:srgbClr val="1D9E75"/>
-          </a:solidFill>
-          <a:ln>
-            <a:noFill/>
-          </a:ln>
-        </p:spPr>
-        <p:style>
-          <a:lnRef idx="1">
-            <a:schemeClr val="accent1"/>
-          </a:lnRef>
-          <a:fillRef idx="3">
-            <a:schemeClr val="accent1"/>
-          </a:fillRef>
-          <a:effectRef idx="2">
-            <a:schemeClr val="accent1"/>
-          </a:effectRef>
-          <a:fontRef idx="minor">
-            <a:schemeClr val="lt1"/>
-          </a:fontRef>
-        </p:style>
-        <p:txBody>
-          <a:bodyPr rtlCol="0" anchor="ctr"/>
-          <a:lstStyle/>
-          <a:p>
-            <a:pPr algn="ctr"/>
-          </a:p>
-        </p:txBody>
-      </p:sp>
-      <p:sp>
-        <p:nvSpPr>
-          <p:cNvPr id="8" name="TextBox 7"/>
+          <p:cNvPr id="7" name="TextBox 6"/>
           <p:cNvSpPr txBox="1"/>
           <p:nvPr/>
         </p:nvSpPr>
@@ -4136,7 +5053,7 @@
                 <a:ea typeface="Hiragino Sans"/>
                 <a:cs typeface="Hiragino Sans"/>
               </a:rPr>
-              <a:t>苦手ケースの切り返しをロープレで固める（②練習・進行中）</a:t>
+              <a:t>まずは現状の勝ち負けを言語化する（①型を知る）</a:t>
             </a:r>
           </a:p>
           <a:p>
@@ -4164,7 +5081,7 @@
                 <a:ea typeface="Hiragino Sans"/>
                 <a:cs typeface="Hiragino Sans"/>
               </a:rPr>
-              <a:t>③実践へ：商談前に型の要点を確認する</a:t>
+              <a:t>②練習へ：苦手ケースの切り返しをロープレ</a:t>
             </a:r>
           </a:p>
         </p:txBody>
@@ -4219,14 +5136,14 @@
                 <a:ea typeface="Hiragino Sans"/>
                 <a:cs typeface="Hiragino Sans"/>
               </a:rPr>
-              <a:t>岡野（wanny）｜契約を安定させる（クローザー）</a:t>
+              <a:t>今川（E.L.P・営業部長）｜チームの成約を仕組み化する（マネジメント）</a:t>
             </a:r>
           </a:p>
         </p:txBody>
       </p:sp>
       <p:pic>
         <p:nvPicPr>
-          <p:cNvPr id="3" name="Picture 2" descr="tmpbgm172vm.png"/>
+          <p:cNvPr id="3" name="Picture 2" descr="tmpxbdt9289.png"/>
           <p:cNvPicPr>
             <a:picLocks noChangeAspect="1"/>
           </p:cNvPicPr>
@@ -4241,7 +5158,7 @@
         <p:spPr>
           <a:xfrm>
             <a:off x="457200" y="960120"/>
-            <a:ext cx="5777713" cy="5760720"/>
+            <a:ext cx="6277708" cy="5760720"/>
           </a:xfrm>
           <a:prstGeom prst="rect">
             <a:avLst/>
@@ -4317,7 +5234,7 @@
                 <a:ea typeface="Hiragino Sans"/>
                 <a:cs typeface="Hiragino Sans"/>
               </a:rPr>
-              <a:t>15%</a:t>
+              <a:t>0%</a:t>
             </a:r>
           </a:p>
         </p:txBody>
@@ -4367,20 +5284,280 @@
       </p:sp>
       <p:sp>
         <p:nvSpPr>
-          <p:cNvPr id="7" name="Rounded Rectangle 6"/>
+          <p:cNvPr id="7" name="TextBox 6"/>
+          <p:cNvSpPr txBox="1"/>
+          <p:nvPr/>
+        </p:nvSpPr>
+        <p:spPr>
+          <a:xfrm>
+            <a:off x="8138160" y="2286000"/>
+            <a:ext cx="3566160" cy="4023360"/>
+          </a:xfrm>
+          <a:prstGeom prst="rect">
+            <a:avLst/>
+          </a:prstGeom>
+          <a:noFill/>
+        </p:spPr>
+        <p:txBody>
+          <a:bodyPr wrap="square" anchor="t">
+            <a:spAutoFit/>
+          </a:bodyPr>
+          <a:lstStyle/>
+          <a:p>
+            <a:pPr algn="l"/>
+            <a:r>
+              <a:rPr sz="1200" b="1">
+                <a:solidFill>
+                  <a:srgbClr val="6357CC"/>
+                </a:solidFill>
+                <a:latin typeface="Hiragino Sans"/>
+                <a:ea typeface="Hiragino Sans"/>
+                <a:cs typeface="Hiragino Sans"/>
+              </a:rPr>
+              <a:t>ゴール</a:t>
+            </a:r>
+          </a:p>
+          <a:p>
+            <a:pPr algn="l"/>
+            <a:r>
+              <a:rPr sz="1300" b="0">
+                <a:solidFill>
+                  <a:srgbClr val="1F2933"/>
+                </a:solidFill>
+                <a:latin typeface="Hiragino Sans"/>
+                <a:ea typeface="Hiragino Sans"/>
+                <a:cs typeface="Hiragino Sans"/>
+              </a:rPr>
+              <a:t>各メンバーの型を引き出し、チーム全体の成約率を底上げできている</a:t>
+            </a:r>
+          </a:p>
+          <a:p>
+            <a:pPr algn="l"/>
+            <a:r>
+              <a:rPr sz="1200" b="1">
+                <a:solidFill>
+                  <a:srgbClr val="EF9F27"/>
+                </a:solidFill>
+                <a:latin typeface="Hiragino Sans"/>
+                <a:ea typeface="Hiragino Sans"/>
+                <a:cs typeface="Hiragino Sans"/>
+              </a:rPr>
+              <a:t>今週のフォーカス</a:t>
+            </a:r>
+          </a:p>
+          <a:p>
+            <a:pPr algn="l"/>
+            <a:r>
+              <a:rPr sz="1300" b="0">
+                <a:solidFill>
+                  <a:srgbClr val="1F2933"/>
+                </a:solidFill>
+                <a:latin typeface="Hiragino Sans"/>
+                <a:ea typeface="Hiragino Sans"/>
+                <a:cs typeface="Hiragino Sans"/>
+              </a:rPr>
+              <a:t>まずは各メンバーの勝ち負けと現在地を把握する（①型を知る）</a:t>
+            </a:r>
+          </a:p>
+          <a:p>
+            <a:pPr algn="l"/>
+            <a:r>
+              <a:rPr sz="1200" b="1">
+                <a:solidFill>
+                  <a:srgbClr val="67707A"/>
+                </a:solidFill>
+                <a:latin typeface="Hiragino Sans"/>
+                <a:ea typeface="Hiragino Sans"/>
+                <a:cs typeface="Hiragino Sans"/>
+              </a:rPr>
+              <a:t>ネクストアクション</a:t>
+            </a:r>
+          </a:p>
+          <a:p>
+            <a:pPr algn="l"/>
+            <a:r>
+              <a:rPr sz="1300" b="0">
+                <a:solidFill>
+                  <a:srgbClr val="1F2933"/>
+                </a:solidFill>
+                <a:latin typeface="Hiragino Sans"/>
+                <a:ea typeface="Hiragino Sans"/>
+                <a:cs typeface="Hiragino Sans"/>
+              </a:rPr>
+              <a:t>②練習へ：1on1の問いかけ設計を用意する</a:t>
+            </a:r>
+          </a:p>
+        </p:txBody>
+      </p:sp>
+    </p:spTree>
+  </p:cSld>
+  <p:clrMapOvr>
+    <a:masterClrMapping/>
+  </p:clrMapOvr>
+</p:sld>
+</file>
+
+<file path=ppt/slides/slide4.xml><?xml version="1.0" encoding="utf-8"?>
+<p:sld xmlns:a="http://schemas.openxmlformats.org/drawingml/2006/main" xmlns:p="http://schemas.openxmlformats.org/presentationml/2006/main" xmlns:r="http://schemas.openxmlformats.org/officeDocument/2006/relationships">
+  <p:cSld>
+    <p:spTree>
+      <p:nvGrpSpPr>
+        <p:cNvPr id="1" name=""/>
+        <p:cNvGrpSpPr/>
+        <p:nvPr/>
+      </p:nvGrpSpPr>
+      <p:grpSpPr/>
+      <p:sp>
+        <p:nvSpPr>
+          <p:cNvPr id="2" name="TextBox 1"/>
+          <p:cNvSpPr txBox="1"/>
+          <p:nvPr/>
+        </p:nvSpPr>
+        <p:spPr>
+          <a:xfrm>
+            <a:off x="457200" y="274320"/>
+            <a:ext cx="11247120" cy="548640"/>
+          </a:xfrm>
+          <a:prstGeom prst="rect">
+            <a:avLst/>
+          </a:prstGeom>
+          <a:noFill/>
+        </p:spPr>
+        <p:txBody>
+          <a:bodyPr wrap="square" anchor="t">
+            <a:spAutoFit/>
+          </a:bodyPr>
+          <a:lstStyle/>
+          <a:p>
+            <a:pPr algn="l"/>
+            <a:r>
+              <a:rPr sz="2200" b="1">
+                <a:solidFill>
+                  <a:srgbClr val="1F2933"/>
+                </a:solidFill>
+                <a:latin typeface="Hiragino Sans"/>
+                <a:ea typeface="Hiragino Sans"/>
+                <a:cs typeface="Hiragino Sans"/>
+              </a:rPr>
+              <a:t>宮腰（wanny・戸田指導）｜契約を安定させる（クローザー）</a:t>
+            </a:r>
+          </a:p>
+        </p:txBody>
+      </p:sp>
+      <p:pic>
+        <p:nvPicPr>
+          <p:cNvPr id="3" name="Picture 2" descr="tmp4nso4r0u.png"/>
+          <p:cNvPicPr>
+            <a:picLocks noChangeAspect="1"/>
+          </p:cNvPicPr>
+          <p:nvPr/>
+        </p:nvPicPr>
+        <p:blipFill>
+          <a:blip r:embed="rId2"/>
+          <a:stretch>
+            <a:fillRect/>
+          </a:stretch>
+        </p:blipFill>
+        <p:spPr>
+          <a:xfrm>
+            <a:off x="457200" y="960120"/>
+            <a:ext cx="6277708" cy="5760720"/>
+          </a:xfrm>
+          <a:prstGeom prst="rect">
+            <a:avLst/>
+          </a:prstGeom>
+        </p:spPr>
+      </p:pic>
+      <p:sp>
+        <p:nvSpPr>
+          <p:cNvPr id="4" name="TextBox 3"/>
+          <p:cNvSpPr txBox="1"/>
+          <p:nvPr/>
+        </p:nvSpPr>
+        <p:spPr>
+          <a:xfrm>
+            <a:off x="8138160" y="1005840"/>
+            <a:ext cx="3566160" cy="274320"/>
+          </a:xfrm>
+          <a:prstGeom prst="rect">
+            <a:avLst/>
+          </a:prstGeom>
+          <a:noFill/>
+        </p:spPr>
+        <p:txBody>
+          <a:bodyPr wrap="square" anchor="t">
+            <a:spAutoFit/>
+          </a:bodyPr>
+          <a:lstStyle/>
+          <a:p>
+            <a:pPr algn="l"/>
+            <a:r>
+              <a:rPr sz="1200" b="1">
+                <a:solidFill>
+                  <a:srgbClr val="67707A"/>
+                </a:solidFill>
+                <a:latin typeface="Hiragino Sans"/>
+                <a:ea typeface="Hiragino Sans"/>
+                <a:cs typeface="Hiragino Sans"/>
+              </a:rPr>
+              <a:t>達成率</a:t>
+            </a:r>
+          </a:p>
+        </p:txBody>
+      </p:sp>
+      <p:sp>
+        <p:nvSpPr>
+          <p:cNvPr id="5" name="TextBox 4"/>
+          <p:cNvSpPr txBox="1"/>
+          <p:nvPr/>
+        </p:nvSpPr>
+        <p:spPr>
+          <a:xfrm>
+            <a:off x="8138160" y="1234440"/>
+            <a:ext cx="3566160" cy="548640"/>
+          </a:xfrm>
+          <a:prstGeom prst="rect">
+            <a:avLst/>
+          </a:prstGeom>
+          <a:noFill/>
+        </p:spPr>
+        <p:txBody>
+          <a:bodyPr wrap="square" anchor="t">
+            <a:spAutoFit/>
+          </a:bodyPr>
+          <a:lstStyle/>
+          <a:p>
+            <a:pPr algn="l"/>
+            <a:r>
+              <a:rPr sz="3400" b="1">
+                <a:solidFill>
+                  <a:srgbClr val="1D9E75"/>
+                </a:solidFill>
+                <a:latin typeface="Hiragino Sans"/>
+                <a:ea typeface="Hiragino Sans"/>
+                <a:cs typeface="Hiragino Sans"/>
+              </a:rPr>
+              <a:t>20%</a:t>
+            </a:r>
+          </a:p>
+        </p:txBody>
+      </p:sp>
+      <p:sp>
+        <p:nvSpPr>
+          <p:cNvPr id="6" name="Rounded Rectangle 5"/>
           <p:cNvSpPr/>
           <p:nvPr/>
         </p:nvSpPr>
         <p:spPr>
           <a:xfrm>
             <a:off x="8138160" y="1920240"/>
-            <a:ext cx="534924" cy="146304"/>
+            <a:ext cx="3566160" cy="146304"/>
           </a:xfrm>
           <a:prstGeom prst="roundRect">
             <a:avLst/>
           </a:prstGeom>
           <a:solidFill>
-            <a:srgbClr val="1D9E75"/>
+            <a:srgbClr val="F2F4F6"/>
           </a:solidFill>
           <a:ln>
             <a:noFill/>
@@ -4410,6 +5587,49 @@
       </p:sp>
       <p:sp>
         <p:nvSpPr>
+          <p:cNvPr id="7" name="Rounded Rectangle 6"/>
+          <p:cNvSpPr/>
+          <p:nvPr/>
+        </p:nvSpPr>
+        <p:spPr>
+          <a:xfrm>
+            <a:off x="8138160" y="1920240"/>
+            <a:ext cx="713232" cy="146304"/>
+          </a:xfrm>
+          <a:prstGeom prst="roundRect">
+            <a:avLst/>
+          </a:prstGeom>
+          <a:solidFill>
+            <a:srgbClr val="1D9E75"/>
+          </a:solidFill>
+          <a:ln>
+            <a:noFill/>
+          </a:ln>
+        </p:spPr>
+        <p:style>
+          <a:lnRef idx="1">
+            <a:schemeClr val="accent1"/>
+          </a:lnRef>
+          <a:fillRef idx="3">
+            <a:schemeClr val="accent1"/>
+          </a:fillRef>
+          <a:effectRef idx="2">
+            <a:schemeClr val="accent1"/>
+          </a:effectRef>
+          <a:fontRef idx="minor">
+            <a:schemeClr val="lt1"/>
+          </a:fontRef>
+        </p:style>
+        <p:txBody>
+          <a:bodyPr rtlCol="0" anchor="ctr"/>
+          <a:lstStyle/>
+          <a:p>
+            <a:pPr algn="ctr"/>
+          </a:p>
+        </p:txBody>
+      </p:sp>
+      <p:sp>
+        <p:nvSpPr>
           <p:cNvPr id="8" name="TextBox 7"/>
           <p:cNvSpPr txBox="1"/>
           <p:nvPr/>
@@ -4511,6 +5731,1261 @@
                 <a:cs typeface="Hiragino Sans"/>
               </a:rPr>
               <a:t>③実践へ：商談前に型の要点を確認する</a:t>
+            </a:r>
+          </a:p>
+        </p:txBody>
+      </p:sp>
+    </p:spTree>
+  </p:cSld>
+  <p:clrMapOvr>
+    <a:masterClrMapping/>
+  </p:clrMapOvr>
+</p:sld>
+</file>
+
+<file path=ppt/slides/slide5.xml><?xml version="1.0" encoding="utf-8"?>
+<p:sld xmlns:a="http://schemas.openxmlformats.org/drawingml/2006/main" xmlns:p="http://schemas.openxmlformats.org/presentationml/2006/main" xmlns:r="http://schemas.openxmlformats.org/officeDocument/2006/relationships">
+  <p:cSld>
+    <p:spTree>
+      <p:nvGrpSpPr>
+        <p:cNvPr id="1" name=""/>
+        <p:cNvGrpSpPr/>
+        <p:nvPr/>
+      </p:nvGrpSpPr>
+      <p:grpSpPr/>
+      <p:sp>
+        <p:nvSpPr>
+          <p:cNvPr id="2" name="TextBox 1"/>
+          <p:cNvSpPr txBox="1"/>
+          <p:nvPr/>
+        </p:nvSpPr>
+        <p:spPr>
+          <a:xfrm>
+            <a:off x="457200" y="274320"/>
+            <a:ext cx="11247120" cy="548640"/>
+          </a:xfrm>
+          <a:prstGeom prst="rect">
+            <a:avLst/>
+          </a:prstGeom>
+          <a:noFill/>
+        </p:spPr>
+        <p:txBody>
+          <a:bodyPr wrap="square" anchor="t">
+            <a:spAutoFit/>
+          </a:bodyPr>
+          <a:lstStyle/>
+          <a:p>
+            <a:pPr algn="l"/>
+            <a:r>
+              <a:rPr sz="2200" b="1">
+                <a:solidFill>
+                  <a:srgbClr val="1F2933"/>
+                </a:solidFill>
+                <a:latin typeface="Hiragino Sans"/>
+                <a:ea typeface="Hiragino Sans"/>
+                <a:cs typeface="Hiragino Sans"/>
+              </a:rPr>
+              <a:t>岡野（wanny）｜契約を安定させる（クローザー）</a:t>
+            </a:r>
+          </a:p>
+        </p:txBody>
+      </p:sp>
+      <p:pic>
+        <p:nvPicPr>
+          <p:cNvPr id="3" name="Picture 2" descr="tmpv2i6zbtj.png"/>
+          <p:cNvPicPr>
+            <a:picLocks noChangeAspect="1"/>
+          </p:cNvPicPr>
+          <p:nvPr/>
+        </p:nvPicPr>
+        <p:blipFill>
+          <a:blip r:embed="rId2"/>
+          <a:stretch>
+            <a:fillRect/>
+          </a:stretch>
+        </p:blipFill>
+        <p:spPr>
+          <a:xfrm>
+            <a:off x="457200" y="960120"/>
+            <a:ext cx="5777713" cy="5760720"/>
+          </a:xfrm>
+          <a:prstGeom prst="rect">
+            <a:avLst/>
+          </a:prstGeom>
+        </p:spPr>
+      </p:pic>
+      <p:sp>
+        <p:nvSpPr>
+          <p:cNvPr id="4" name="TextBox 3"/>
+          <p:cNvSpPr txBox="1"/>
+          <p:nvPr/>
+        </p:nvSpPr>
+        <p:spPr>
+          <a:xfrm>
+            <a:off x="8138160" y="1005840"/>
+            <a:ext cx="3566160" cy="274320"/>
+          </a:xfrm>
+          <a:prstGeom prst="rect">
+            <a:avLst/>
+          </a:prstGeom>
+          <a:noFill/>
+        </p:spPr>
+        <p:txBody>
+          <a:bodyPr wrap="square" anchor="t">
+            <a:spAutoFit/>
+          </a:bodyPr>
+          <a:lstStyle/>
+          <a:p>
+            <a:pPr algn="l"/>
+            <a:r>
+              <a:rPr sz="1200" b="1">
+                <a:solidFill>
+                  <a:srgbClr val="67707A"/>
+                </a:solidFill>
+                <a:latin typeface="Hiragino Sans"/>
+                <a:ea typeface="Hiragino Sans"/>
+                <a:cs typeface="Hiragino Sans"/>
+              </a:rPr>
+              <a:t>達成率</a:t>
+            </a:r>
+          </a:p>
+        </p:txBody>
+      </p:sp>
+      <p:sp>
+        <p:nvSpPr>
+          <p:cNvPr id="5" name="TextBox 4"/>
+          <p:cNvSpPr txBox="1"/>
+          <p:nvPr/>
+        </p:nvSpPr>
+        <p:spPr>
+          <a:xfrm>
+            <a:off x="8138160" y="1234440"/>
+            <a:ext cx="3566160" cy="548640"/>
+          </a:xfrm>
+          <a:prstGeom prst="rect">
+            <a:avLst/>
+          </a:prstGeom>
+          <a:noFill/>
+        </p:spPr>
+        <p:txBody>
+          <a:bodyPr wrap="square" anchor="t">
+            <a:spAutoFit/>
+          </a:bodyPr>
+          <a:lstStyle/>
+          <a:p>
+            <a:pPr algn="l"/>
+            <a:r>
+              <a:rPr sz="3400" b="1">
+                <a:solidFill>
+                  <a:srgbClr val="1D9E75"/>
+                </a:solidFill>
+                <a:latin typeface="Hiragino Sans"/>
+                <a:ea typeface="Hiragino Sans"/>
+                <a:cs typeface="Hiragino Sans"/>
+              </a:rPr>
+              <a:t>15%</a:t>
+            </a:r>
+          </a:p>
+        </p:txBody>
+      </p:sp>
+      <p:sp>
+        <p:nvSpPr>
+          <p:cNvPr id="6" name="Rounded Rectangle 5"/>
+          <p:cNvSpPr/>
+          <p:nvPr/>
+        </p:nvSpPr>
+        <p:spPr>
+          <a:xfrm>
+            <a:off x="8138160" y="1920240"/>
+            <a:ext cx="3566160" cy="146304"/>
+          </a:xfrm>
+          <a:prstGeom prst="roundRect">
+            <a:avLst/>
+          </a:prstGeom>
+          <a:solidFill>
+            <a:srgbClr val="F2F4F6"/>
+          </a:solidFill>
+          <a:ln>
+            <a:noFill/>
+          </a:ln>
+        </p:spPr>
+        <p:style>
+          <a:lnRef idx="1">
+            <a:schemeClr val="accent1"/>
+          </a:lnRef>
+          <a:fillRef idx="3">
+            <a:schemeClr val="accent1"/>
+          </a:fillRef>
+          <a:effectRef idx="2">
+            <a:schemeClr val="accent1"/>
+          </a:effectRef>
+          <a:fontRef idx="minor">
+            <a:schemeClr val="lt1"/>
+          </a:fontRef>
+        </p:style>
+        <p:txBody>
+          <a:bodyPr rtlCol="0" anchor="ctr"/>
+          <a:lstStyle/>
+          <a:p>
+            <a:pPr algn="ctr"/>
+          </a:p>
+        </p:txBody>
+      </p:sp>
+      <p:sp>
+        <p:nvSpPr>
+          <p:cNvPr id="7" name="Rounded Rectangle 6"/>
+          <p:cNvSpPr/>
+          <p:nvPr/>
+        </p:nvSpPr>
+        <p:spPr>
+          <a:xfrm>
+            <a:off x="8138160" y="1920240"/>
+            <a:ext cx="534924" cy="146304"/>
+          </a:xfrm>
+          <a:prstGeom prst="roundRect">
+            <a:avLst/>
+          </a:prstGeom>
+          <a:solidFill>
+            <a:srgbClr val="1D9E75"/>
+          </a:solidFill>
+          <a:ln>
+            <a:noFill/>
+          </a:ln>
+        </p:spPr>
+        <p:style>
+          <a:lnRef idx="1">
+            <a:schemeClr val="accent1"/>
+          </a:lnRef>
+          <a:fillRef idx="3">
+            <a:schemeClr val="accent1"/>
+          </a:fillRef>
+          <a:effectRef idx="2">
+            <a:schemeClr val="accent1"/>
+          </a:effectRef>
+          <a:fontRef idx="minor">
+            <a:schemeClr val="lt1"/>
+          </a:fontRef>
+        </p:style>
+        <p:txBody>
+          <a:bodyPr rtlCol="0" anchor="ctr"/>
+          <a:lstStyle/>
+          <a:p>
+            <a:pPr algn="ctr"/>
+          </a:p>
+        </p:txBody>
+      </p:sp>
+      <p:sp>
+        <p:nvSpPr>
+          <p:cNvPr id="8" name="TextBox 7"/>
+          <p:cNvSpPr txBox="1"/>
+          <p:nvPr/>
+        </p:nvSpPr>
+        <p:spPr>
+          <a:xfrm>
+            <a:off x="8138160" y="2286000"/>
+            <a:ext cx="3566160" cy="4023360"/>
+          </a:xfrm>
+          <a:prstGeom prst="rect">
+            <a:avLst/>
+          </a:prstGeom>
+          <a:noFill/>
+        </p:spPr>
+        <p:txBody>
+          <a:bodyPr wrap="square" anchor="t">
+            <a:spAutoFit/>
+          </a:bodyPr>
+          <a:lstStyle/>
+          <a:p>
+            <a:pPr algn="l"/>
+            <a:r>
+              <a:rPr sz="1200" b="1">
+                <a:solidFill>
+                  <a:srgbClr val="6357CC"/>
+                </a:solidFill>
+                <a:latin typeface="Hiragino Sans"/>
+                <a:ea typeface="Hiragino Sans"/>
+                <a:cs typeface="Hiragino Sans"/>
+              </a:rPr>
+              <a:t>ゴール</a:t>
+            </a:r>
+          </a:p>
+          <a:p>
+            <a:pPr algn="l"/>
+            <a:r>
+              <a:rPr sz="1300" b="0">
+                <a:solidFill>
+                  <a:srgbClr val="1F2933"/>
+                </a:solidFill>
+                <a:latin typeface="Hiragino Sans"/>
+                <a:ea typeface="Hiragino Sans"/>
+                <a:cs typeface="Hiragino Sans"/>
+              </a:rPr>
+              <a:t>客層を問わず自分の型で契約まで運び、成約が安定する</a:t>
+            </a:r>
+          </a:p>
+          <a:p>
+            <a:pPr algn="l"/>
+            <a:r>
+              <a:rPr sz="1200" b="1">
+                <a:solidFill>
+                  <a:srgbClr val="EF9F27"/>
+                </a:solidFill>
+                <a:latin typeface="Hiragino Sans"/>
+                <a:ea typeface="Hiragino Sans"/>
+                <a:cs typeface="Hiragino Sans"/>
+              </a:rPr>
+              <a:t>今週のフォーカス</a:t>
+            </a:r>
+          </a:p>
+          <a:p>
+            <a:pPr algn="l"/>
+            <a:r>
+              <a:rPr sz="1300" b="0">
+                <a:solidFill>
+                  <a:srgbClr val="1F2933"/>
+                </a:solidFill>
+                <a:latin typeface="Hiragino Sans"/>
+                <a:ea typeface="Hiragino Sans"/>
+                <a:cs typeface="Hiragino Sans"/>
+              </a:rPr>
+              <a:t>苦手ケースの切り返しをロープレで固める（②練習・進行中）</a:t>
+            </a:r>
+          </a:p>
+          <a:p>
+            <a:pPr algn="l"/>
+            <a:r>
+              <a:rPr sz="1200" b="1">
+                <a:solidFill>
+                  <a:srgbClr val="67707A"/>
+                </a:solidFill>
+                <a:latin typeface="Hiragino Sans"/>
+                <a:ea typeface="Hiragino Sans"/>
+                <a:cs typeface="Hiragino Sans"/>
+              </a:rPr>
+              <a:t>ネクストアクション</a:t>
+            </a:r>
+          </a:p>
+          <a:p>
+            <a:pPr algn="l"/>
+            <a:r>
+              <a:rPr sz="1300" b="0">
+                <a:solidFill>
+                  <a:srgbClr val="1F2933"/>
+                </a:solidFill>
+                <a:latin typeface="Hiragino Sans"/>
+                <a:ea typeface="Hiragino Sans"/>
+                <a:cs typeface="Hiragino Sans"/>
+              </a:rPr>
+              <a:t>③実践へ：商談前に型の要点を確認する</a:t>
+            </a:r>
+          </a:p>
+        </p:txBody>
+      </p:sp>
+    </p:spTree>
+  </p:cSld>
+  <p:clrMapOvr>
+    <a:masterClrMapping/>
+  </p:clrMapOvr>
+</p:sld>
+</file>
+
+<file path=ppt/slides/slide6.xml><?xml version="1.0" encoding="utf-8"?>
+<p:sld xmlns:a="http://schemas.openxmlformats.org/drawingml/2006/main" xmlns:p="http://schemas.openxmlformats.org/presentationml/2006/main" xmlns:r="http://schemas.openxmlformats.org/officeDocument/2006/relationships">
+  <p:cSld>
+    <p:spTree>
+      <p:nvGrpSpPr>
+        <p:cNvPr id="1" name=""/>
+        <p:cNvGrpSpPr/>
+        <p:nvPr/>
+      </p:nvGrpSpPr>
+      <p:grpSpPr/>
+      <p:sp>
+        <p:nvSpPr>
+          <p:cNvPr id="2" name="TextBox 1"/>
+          <p:cNvSpPr txBox="1"/>
+          <p:nvPr/>
+        </p:nvSpPr>
+        <p:spPr>
+          <a:xfrm>
+            <a:off x="457200" y="274320"/>
+            <a:ext cx="11247120" cy="548640"/>
+          </a:xfrm>
+          <a:prstGeom prst="rect">
+            <a:avLst/>
+          </a:prstGeom>
+          <a:noFill/>
+        </p:spPr>
+        <p:txBody>
+          <a:bodyPr wrap="square" anchor="t">
+            <a:spAutoFit/>
+          </a:bodyPr>
+          <a:lstStyle/>
+          <a:p>
+            <a:pPr algn="l"/>
+            <a:r>
+              <a:rPr sz="2200" b="1">
+                <a:solidFill>
+                  <a:srgbClr val="1F2933"/>
+                </a:solidFill>
+                <a:latin typeface="Hiragino Sans"/>
+                <a:ea typeface="Hiragino Sans"/>
+                <a:cs typeface="Hiragino Sans"/>
+              </a:rPr>
+              <a:t>戸田（wanny・宮腰指導）｜契約を安定させる（クローザー）</a:t>
+            </a:r>
+          </a:p>
+        </p:txBody>
+      </p:sp>
+      <p:pic>
+        <p:nvPicPr>
+          <p:cNvPr id="3" name="Picture 2" descr="tmppz1bql63.png"/>
+          <p:cNvPicPr>
+            <a:picLocks noChangeAspect="1"/>
+          </p:cNvPicPr>
+          <p:nvPr/>
+        </p:nvPicPr>
+        <p:blipFill>
+          <a:blip r:embed="rId2"/>
+          <a:stretch>
+            <a:fillRect/>
+          </a:stretch>
+        </p:blipFill>
+        <p:spPr>
+          <a:xfrm>
+            <a:off x="457200" y="960120"/>
+            <a:ext cx="6277708" cy="5760720"/>
+          </a:xfrm>
+          <a:prstGeom prst="rect">
+            <a:avLst/>
+          </a:prstGeom>
+        </p:spPr>
+      </p:pic>
+      <p:sp>
+        <p:nvSpPr>
+          <p:cNvPr id="4" name="TextBox 3"/>
+          <p:cNvSpPr txBox="1"/>
+          <p:nvPr/>
+        </p:nvSpPr>
+        <p:spPr>
+          <a:xfrm>
+            <a:off x="8138160" y="1005840"/>
+            <a:ext cx="3566160" cy="274320"/>
+          </a:xfrm>
+          <a:prstGeom prst="rect">
+            <a:avLst/>
+          </a:prstGeom>
+          <a:noFill/>
+        </p:spPr>
+        <p:txBody>
+          <a:bodyPr wrap="square" anchor="t">
+            <a:spAutoFit/>
+          </a:bodyPr>
+          <a:lstStyle/>
+          <a:p>
+            <a:pPr algn="l"/>
+            <a:r>
+              <a:rPr sz="1200" b="1">
+                <a:solidFill>
+                  <a:srgbClr val="67707A"/>
+                </a:solidFill>
+                <a:latin typeface="Hiragino Sans"/>
+                <a:ea typeface="Hiragino Sans"/>
+                <a:cs typeface="Hiragino Sans"/>
+              </a:rPr>
+              <a:t>達成率</a:t>
+            </a:r>
+          </a:p>
+        </p:txBody>
+      </p:sp>
+      <p:sp>
+        <p:nvSpPr>
+          <p:cNvPr id="5" name="TextBox 4"/>
+          <p:cNvSpPr txBox="1"/>
+          <p:nvPr/>
+        </p:nvSpPr>
+        <p:spPr>
+          <a:xfrm>
+            <a:off x="8138160" y="1234440"/>
+            <a:ext cx="3566160" cy="548640"/>
+          </a:xfrm>
+          <a:prstGeom prst="rect">
+            <a:avLst/>
+          </a:prstGeom>
+          <a:noFill/>
+        </p:spPr>
+        <p:txBody>
+          <a:bodyPr wrap="square" anchor="t">
+            <a:spAutoFit/>
+          </a:bodyPr>
+          <a:lstStyle/>
+          <a:p>
+            <a:pPr algn="l"/>
+            <a:r>
+              <a:rPr sz="3400" b="1">
+                <a:solidFill>
+                  <a:srgbClr val="1D9E75"/>
+                </a:solidFill>
+                <a:latin typeface="Hiragino Sans"/>
+                <a:ea typeface="Hiragino Sans"/>
+                <a:cs typeface="Hiragino Sans"/>
+              </a:rPr>
+              <a:t>0%</a:t>
+            </a:r>
+          </a:p>
+        </p:txBody>
+      </p:sp>
+      <p:sp>
+        <p:nvSpPr>
+          <p:cNvPr id="6" name="Rounded Rectangle 5"/>
+          <p:cNvSpPr/>
+          <p:nvPr/>
+        </p:nvSpPr>
+        <p:spPr>
+          <a:xfrm>
+            <a:off x="8138160" y="1920240"/>
+            <a:ext cx="3566160" cy="146304"/>
+          </a:xfrm>
+          <a:prstGeom prst="roundRect">
+            <a:avLst/>
+          </a:prstGeom>
+          <a:solidFill>
+            <a:srgbClr val="F2F4F6"/>
+          </a:solidFill>
+          <a:ln>
+            <a:noFill/>
+          </a:ln>
+        </p:spPr>
+        <p:style>
+          <a:lnRef idx="1">
+            <a:schemeClr val="accent1"/>
+          </a:lnRef>
+          <a:fillRef idx="3">
+            <a:schemeClr val="accent1"/>
+          </a:fillRef>
+          <a:effectRef idx="2">
+            <a:schemeClr val="accent1"/>
+          </a:effectRef>
+          <a:fontRef idx="minor">
+            <a:schemeClr val="lt1"/>
+          </a:fontRef>
+        </p:style>
+        <p:txBody>
+          <a:bodyPr rtlCol="0" anchor="ctr"/>
+          <a:lstStyle/>
+          <a:p>
+            <a:pPr algn="ctr"/>
+          </a:p>
+        </p:txBody>
+      </p:sp>
+      <p:sp>
+        <p:nvSpPr>
+          <p:cNvPr id="7" name="TextBox 6"/>
+          <p:cNvSpPr txBox="1"/>
+          <p:nvPr/>
+        </p:nvSpPr>
+        <p:spPr>
+          <a:xfrm>
+            <a:off x="8138160" y="2286000"/>
+            <a:ext cx="3566160" cy="4023360"/>
+          </a:xfrm>
+          <a:prstGeom prst="rect">
+            <a:avLst/>
+          </a:prstGeom>
+          <a:noFill/>
+        </p:spPr>
+        <p:txBody>
+          <a:bodyPr wrap="square" anchor="t">
+            <a:spAutoFit/>
+          </a:bodyPr>
+          <a:lstStyle/>
+          <a:p>
+            <a:pPr algn="l"/>
+            <a:r>
+              <a:rPr sz="1200" b="1">
+                <a:solidFill>
+                  <a:srgbClr val="6357CC"/>
+                </a:solidFill>
+                <a:latin typeface="Hiragino Sans"/>
+                <a:ea typeface="Hiragino Sans"/>
+                <a:cs typeface="Hiragino Sans"/>
+              </a:rPr>
+              <a:t>ゴール</a:t>
+            </a:r>
+          </a:p>
+          <a:p>
+            <a:pPr algn="l"/>
+            <a:r>
+              <a:rPr sz="1300" b="0">
+                <a:solidFill>
+                  <a:srgbClr val="1F2933"/>
+                </a:solidFill>
+                <a:latin typeface="Hiragino Sans"/>
+                <a:ea typeface="Hiragino Sans"/>
+                <a:cs typeface="Hiragino Sans"/>
+              </a:rPr>
+              <a:t>客層を問わず自分の型で契約まで運び、成約が安定する</a:t>
+            </a:r>
+          </a:p>
+          <a:p>
+            <a:pPr algn="l"/>
+            <a:r>
+              <a:rPr sz="1200" b="1">
+                <a:solidFill>
+                  <a:srgbClr val="EF9F27"/>
+                </a:solidFill>
+                <a:latin typeface="Hiragino Sans"/>
+                <a:ea typeface="Hiragino Sans"/>
+                <a:cs typeface="Hiragino Sans"/>
+              </a:rPr>
+              <a:t>今週のフォーカス</a:t>
+            </a:r>
+          </a:p>
+          <a:p>
+            <a:pPr algn="l"/>
+            <a:r>
+              <a:rPr sz="1300" b="0">
+                <a:solidFill>
+                  <a:srgbClr val="1F2933"/>
+                </a:solidFill>
+                <a:latin typeface="Hiragino Sans"/>
+                <a:ea typeface="Hiragino Sans"/>
+                <a:cs typeface="Hiragino Sans"/>
+              </a:rPr>
+              <a:t>まずは現状の勝ち負けを言語化する（①型を知る）</a:t>
+            </a:r>
+          </a:p>
+          <a:p>
+            <a:pPr algn="l"/>
+            <a:r>
+              <a:rPr sz="1200" b="1">
+                <a:solidFill>
+                  <a:srgbClr val="67707A"/>
+                </a:solidFill>
+                <a:latin typeface="Hiragino Sans"/>
+                <a:ea typeface="Hiragino Sans"/>
+                <a:cs typeface="Hiragino Sans"/>
+              </a:rPr>
+              <a:t>ネクストアクション</a:t>
+            </a:r>
+          </a:p>
+          <a:p>
+            <a:pPr algn="l"/>
+            <a:r>
+              <a:rPr sz="1300" b="0">
+                <a:solidFill>
+                  <a:srgbClr val="1F2933"/>
+                </a:solidFill>
+                <a:latin typeface="Hiragino Sans"/>
+                <a:ea typeface="Hiragino Sans"/>
+                <a:cs typeface="Hiragino Sans"/>
+              </a:rPr>
+              <a:t>②練習へ：苦手ケースの切り返しをロープレ</a:t>
+            </a:r>
+          </a:p>
+        </p:txBody>
+      </p:sp>
+    </p:spTree>
+  </p:cSld>
+  <p:clrMapOvr>
+    <a:masterClrMapping/>
+  </p:clrMapOvr>
+</p:sld>
+</file>
+
+<file path=ppt/slides/slide7.xml><?xml version="1.0" encoding="utf-8"?>
+<p:sld xmlns:a="http://schemas.openxmlformats.org/drawingml/2006/main" xmlns:p="http://schemas.openxmlformats.org/presentationml/2006/main" xmlns:r="http://schemas.openxmlformats.org/officeDocument/2006/relationships">
+  <p:cSld>
+    <p:spTree>
+      <p:nvGrpSpPr>
+        <p:cNvPr id="1" name=""/>
+        <p:cNvGrpSpPr/>
+        <p:nvPr/>
+      </p:nvGrpSpPr>
+      <p:grpSpPr/>
+      <p:sp>
+        <p:nvSpPr>
+          <p:cNvPr id="2" name="TextBox 1"/>
+          <p:cNvSpPr txBox="1"/>
+          <p:nvPr/>
+        </p:nvSpPr>
+        <p:spPr>
+          <a:xfrm>
+            <a:off x="457200" y="274320"/>
+            <a:ext cx="11247120" cy="548640"/>
+          </a:xfrm>
+          <a:prstGeom prst="rect">
+            <a:avLst/>
+          </a:prstGeom>
+          <a:noFill/>
+        </p:spPr>
+        <p:txBody>
+          <a:bodyPr wrap="square" anchor="t">
+            <a:spAutoFit/>
+          </a:bodyPr>
+          <a:lstStyle/>
+          <a:p>
+            <a:pPr algn="l"/>
+            <a:r>
+              <a:rPr sz="2200" b="1">
+                <a:solidFill>
+                  <a:srgbClr val="1F2933"/>
+                </a:solidFill>
+                <a:latin typeface="Hiragino Sans"/>
+                <a:ea typeface="Hiragino Sans"/>
+                <a:cs typeface="Hiragino Sans"/>
+              </a:rPr>
+              <a:t>藤江（ピタサチ・営業）｜契約を安定させる（クローザー）</a:t>
+            </a:r>
+          </a:p>
+        </p:txBody>
+      </p:sp>
+      <p:pic>
+        <p:nvPicPr>
+          <p:cNvPr id="3" name="Picture 2" descr="tmpluu_r2nc.png"/>
+          <p:cNvPicPr>
+            <a:picLocks noChangeAspect="1"/>
+          </p:cNvPicPr>
+          <p:nvPr/>
+        </p:nvPicPr>
+        <p:blipFill>
+          <a:blip r:embed="rId2"/>
+          <a:stretch>
+            <a:fillRect/>
+          </a:stretch>
+        </p:blipFill>
+        <p:spPr>
+          <a:xfrm>
+            <a:off x="457200" y="960120"/>
+            <a:ext cx="6277708" cy="5760720"/>
+          </a:xfrm>
+          <a:prstGeom prst="rect">
+            <a:avLst/>
+          </a:prstGeom>
+        </p:spPr>
+      </p:pic>
+      <p:sp>
+        <p:nvSpPr>
+          <p:cNvPr id="4" name="TextBox 3"/>
+          <p:cNvSpPr txBox="1"/>
+          <p:nvPr/>
+        </p:nvSpPr>
+        <p:spPr>
+          <a:xfrm>
+            <a:off x="8138160" y="1005840"/>
+            <a:ext cx="3566160" cy="274320"/>
+          </a:xfrm>
+          <a:prstGeom prst="rect">
+            <a:avLst/>
+          </a:prstGeom>
+          <a:noFill/>
+        </p:spPr>
+        <p:txBody>
+          <a:bodyPr wrap="square" anchor="t">
+            <a:spAutoFit/>
+          </a:bodyPr>
+          <a:lstStyle/>
+          <a:p>
+            <a:pPr algn="l"/>
+            <a:r>
+              <a:rPr sz="1200" b="1">
+                <a:solidFill>
+                  <a:srgbClr val="67707A"/>
+                </a:solidFill>
+                <a:latin typeface="Hiragino Sans"/>
+                <a:ea typeface="Hiragino Sans"/>
+                <a:cs typeface="Hiragino Sans"/>
+              </a:rPr>
+              <a:t>達成率</a:t>
+            </a:r>
+          </a:p>
+        </p:txBody>
+      </p:sp>
+      <p:sp>
+        <p:nvSpPr>
+          <p:cNvPr id="5" name="TextBox 4"/>
+          <p:cNvSpPr txBox="1"/>
+          <p:nvPr/>
+        </p:nvSpPr>
+        <p:spPr>
+          <a:xfrm>
+            <a:off x="8138160" y="1234440"/>
+            <a:ext cx="3566160" cy="548640"/>
+          </a:xfrm>
+          <a:prstGeom prst="rect">
+            <a:avLst/>
+          </a:prstGeom>
+          <a:noFill/>
+        </p:spPr>
+        <p:txBody>
+          <a:bodyPr wrap="square" anchor="t">
+            <a:spAutoFit/>
+          </a:bodyPr>
+          <a:lstStyle/>
+          <a:p>
+            <a:pPr algn="l"/>
+            <a:r>
+              <a:rPr sz="3400" b="1">
+                <a:solidFill>
+                  <a:srgbClr val="1D9E75"/>
+                </a:solidFill>
+                <a:latin typeface="Hiragino Sans"/>
+                <a:ea typeface="Hiragino Sans"/>
+                <a:cs typeface="Hiragino Sans"/>
+              </a:rPr>
+              <a:t>0%</a:t>
+            </a:r>
+          </a:p>
+        </p:txBody>
+      </p:sp>
+      <p:sp>
+        <p:nvSpPr>
+          <p:cNvPr id="6" name="Rounded Rectangle 5"/>
+          <p:cNvSpPr/>
+          <p:nvPr/>
+        </p:nvSpPr>
+        <p:spPr>
+          <a:xfrm>
+            <a:off x="8138160" y="1920240"/>
+            <a:ext cx="3566160" cy="146304"/>
+          </a:xfrm>
+          <a:prstGeom prst="roundRect">
+            <a:avLst/>
+          </a:prstGeom>
+          <a:solidFill>
+            <a:srgbClr val="F2F4F6"/>
+          </a:solidFill>
+          <a:ln>
+            <a:noFill/>
+          </a:ln>
+        </p:spPr>
+        <p:style>
+          <a:lnRef idx="1">
+            <a:schemeClr val="accent1"/>
+          </a:lnRef>
+          <a:fillRef idx="3">
+            <a:schemeClr val="accent1"/>
+          </a:fillRef>
+          <a:effectRef idx="2">
+            <a:schemeClr val="accent1"/>
+          </a:effectRef>
+          <a:fontRef idx="minor">
+            <a:schemeClr val="lt1"/>
+          </a:fontRef>
+        </p:style>
+        <p:txBody>
+          <a:bodyPr rtlCol="0" anchor="ctr"/>
+          <a:lstStyle/>
+          <a:p>
+            <a:pPr algn="ctr"/>
+          </a:p>
+        </p:txBody>
+      </p:sp>
+      <p:sp>
+        <p:nvSpPr>
+          <p:cNvPr id="7" name="TextBox 6"/>
+          <p:cNvSpPr txBox="1"/>
+          <p:nvPr/>
+        </p:nvSpPr>
+        <p:spPr>
+          <a:xfrm>
+            <a:off x="8138160" y="2286000"/>
+            <a:ext cx="3566160" cy="4023360"/>
+          </a:xfrm>
+          <a:prstGeom prst="rect">
+            <a:avLst/>
+          </a:prstGeom>
+          <a:noFill/>
+        </p:spPr>
+        <p:txBody>
+          <a:bodyPr wrap="square" anchor="t">
+            <a:spAutoFit/>
+          </a:bodyPr>
+          <a:lstStyle/>
+          <a:p>
+            <a:pPr algn="l"/>
+            <a:r>
+              <a:rPr sz="1200" b="1">
+                <a:solidFill>
+                  <a:srgbClr val="6357CC"/>
+                </a:solidFill>
+                <a:latin typeface="Hiragino Sans"/>
+                <a:ea typeface="Hiragino Sans"/>
+                <a:cs typeface="Hiragino Sans"/>
+              </a:rPr>
+              <a:t>ゴール</a:t>
+            </a:r>
+          </a:p>
+          <a:p>
+            <a:pPr algn="l"/>
+            <a:r>
+              <a:rPr sz="1300" b="0">
+                <a:solidFill>
+                  <a:srgbClr val="1F2933"/>
+                </a:solidFill>
+                <a:latin typeface="Hiragino Sans"/>
+                <a:ea typeface="Hiragino Sans"/>
+                <a:cs typeface="Hiragino Sans"/>
+              </a:rPr>
+              <a:t>客層を問わず自分の型で契約まで運び、成約が安定する</a:t>
+            </a:r>
+          </a:p>
+          <a:p>
+            <a:pPr algn="l"/>
+            <a:r>
+              <a:rPr sz="1200" b="1">
+                <a:solidFill>
+                  <a:srgbClr val="EF9F27"/>
+                </a:solidFill>
+                <a:latin typeface="Hiragino Sans"/>
+                <a:ea typeface="Hiragino Sans"/>
+                <a:cs typeface="Hiragino Sans"/>
+              </a:rPr>
+              <a:t>今週のフォーカス</a:t>
+            </a:r>
+          </a:p>
+          <a:p>
+            <a:pPr algn="l"/>
+            <a:r>
+              <a:rPr sz="1300" b="0">
+                <a:solidFill>
+                  <a:srgbClr val="1F2933"/>
+                </a:solidFill>
+                <a:latin typeface="Hiragino Sans"/>
+                <a:ea typeface="Hiragino Sans"/>
+                <a:cs typeface="Hiragino Sans"/>
+              </a:rPr>
+              <a:t>まずは現状の勝ち負けを言語化する（①型を知る）</a:t>
+            </a:r>
+          </a:p>
+          <a:p>
+            <a:pPr algn="l"/>
+            <a:r>
+              <a:rPr sz="1200" b="1">
+                <a:solidFill>
+                  <a:srgbClr val="67707A"/>
+                </a:solidFill>
+                <a:latin typeface="Hiragino Sans"/>
+                <a:ea typeface="Hiragino Sans"/>
+                <a:cs typeface="Hiragino Sans"/>
+              </a:rPr>
+              <a:t>ネクストアクション</a:t>
+            </a:r>
+          </a:p>
+          <a:p>
+            <a:pPr algn="l"/>
+            <a:r>
+              <a:rPr sz="1300" b="0">
+                <a:solidFill>
+                  <a:srgbClr val="1F2933"/>
+                </a:solidFill>
+                <a:latin typeface="Hiragino Sans"/>
+                <a:ea typeface="Hiragino Sans"/>
+                <a:cs typeface="Hiragino Sans"/>
+              </a:rPr>
+              <a:t>②練習へ：苦手ケースの切り返しをロープレ</a:t>
+            </a:r>
+          </a:p>
+        </p:txBody>
+      </p:sp>
+    </p:spTree>
+  </p:cSld>
+  <p:clrMapOvr>
+    <a:masterClrMapping/>
+  </p:clrMapOvr>
+</p:sld>
+</file>
+
+<file path=ppt/slides/slide8.xml><?xml version="1.0" encoding="utf-8"?>
+<p:sld xmlns:a="http://schemas.openxmlformats.org/drawingml/2006/main" xmlns:p="http://schemas.openxmlformats.org/presentationml/2006/main" xmlns:r="http://schemas.openxmlformats.org/officeDocument/2006/relationships">
+  <p:cSld>
+    <p:spTree>
+      <p:nvGrpSpPr>
+        <p:cNvPr id="1" name=""/>
+        <p:cNvGrpSpPr/>
+        <p:nvPr/>
+      </p:nvGrpSpPr>
+      <p:grpSpPr/>
+      <p:sp>
+        <p:nvSpPr>
+          <p:cNvPr id="2" name="TextBox 1"/>
+          <p:cNvSpPr txBox="1"/>
+          <p:nvPr/>
+        </p:nvSpPr>
+        <p:spPr>
+          <a:xfrm>
+            <a:off x="457200" y="274320"/>
+            <a:ext cx="11247120" cy="548640"/>
+          </a:xfrm>
+          <a:prstGeom prst="rect">
+            <a:avLst/>
+          </a:prstGeom>
+          <a:noFill/>
+        </p:spPr>
+        <p:txBody>
+          <a:bodyPr wrap="square" anchor="t">
+            <a:spAutoFit/>
+          </a:bodyPr>
+          <a:lstStyle/>
+          <a:p>
+            <a:pPr algn="l"/>
+            <a:r>
+              <a:rPr sz="2200" b="1">
+                <a:solidFill>
+                  <a:srgbClr val="1F2933"/>
+                </a:solidFill>
+                <a:latin typeface="Hiragino Sans"/>
+                <a:ea typeface="Hiragino Sans"/>
+                <a:cs typeface="Hiragino Sans"/>
+              </a:rPr>
+              <a:t>門田（ピタサチ・役員兼営業）｜契約を安定させる（クローザー）</a:t>
+            </a:r>
+          </a:p>
+        </p:txBody>
+      </p:sp>
+      <p:pic>
+        <p:nvPicPr>
+          <p:cNvPr id="3" name="Picture 2" descr="tmpklm2mhky.png"/>
+          <p:cNvPicPr>
+            <a:picLocks noChangeAspect="1"/>
+          </p:cNvPicPr>
+          <p:nvPr/>
+        </p:nvPicPr>
+        <p:blipFill>
+          <a:blip r:embed="rId2"/>
+          <a:stretch>
+            <a:fillRect/>
+          </a:stretch>
+        </p:blipFill>
+        <p:spPr>
+          <a:xfrm>
+            <a:off x="457200" y="960120"/>
+            <a:ext cx="6277708" cy="5760720"/>
+          </a:xfrm>
+          <a:prstGeom prst="rect">
+            <a:avLst/>
+          </a:prstGeom>
+        </p:spPr>
+      </p:pic>
+      <p:sp>
+        <p:nvSpPr>
+          <p:cNvPr id="4" name="TextBox 3"/>
+          <p:cNvSpPr txBox="1"/>
+          <p:nvPr/>
+        </p:nvSpPr>
+        <p:spPr>
+          <a:xfrm>
+            <a:off x="8138160" y="1005840"/>
+            <a:ext cx="3566160" cy="274320"/>
+          </a:xfrm>
+          <a:prstGeom prst="rect">
+            <a:avLst/>
+          </a:prstGeom>
+          <a:noFill/>
+        </p:spPr>
+        <p:txBody>
+          <a:bodyPr wrap="square" anchor="t">
+            <a:spAutoFit/>
+          </a:bodyPr>
+          <a:lstStyle/>
+          <a:p>
+            <a:pPr algn="l"/>
+            <a:r>
+              <a:rPr sz="1200" b="1">
+                <a:solidFill>
+                  <a:srgbClr val="67707A"/>
+                </a:solidFill>
+                <a:latin typeface="Hiragino Sans"/>
+                <a:ea typeface="Hiragino Sans"/>
+                <a:cs typeface="Hiragino Sans"/>
+              </a:rPr>
+              <a:t>達成率</a:t>
+            </a:r>
+          </a:p>
+        </p:txBody>
+      </p:sp>
+      <p:sp>
+        <p:nvSpPr>
+          <p:cNvPr id="5" name="TextBox 4"/>
+          <p:cNvSpPr txBox="1"/>
+          <p:nvPr/>
+        </p:nvSpPr>
+        <p:spPr>
+          <a:xfrm>
+            <a:off x="8138160" y="1234440"/>
+            <a:ext cx="3566160" cy="548640"/>
+          </a:xfrm>
+          <a:prstGeom prst="rect">
+            <a:avLst/>
+          </a:prstGeom>
+          <a:noFill/>
+        </p:spPr>
+        <p:txBody>
+          <a:bodyPr wrap="square" anchor="t">
+            <a:spAutoFit/>
+          </a:bodyPr>
+          <a:lstStyle/>
+          <a:p>
+            <a:pPr algn="l"/>
+            <a:r>
+              <a:rPr sz="3400" b="1">
+                <a:solidFill>
+                  <a:srgbClr val="1D9E75"/>
+                </a:solidFill>
+                <a:latin typeface="Hiragino Sans"/>
+                <a:ea typeface="Hiragino Sans"/>
+                <a:cs typeface="Hiragino Sans"/>
+              </a:rPr>
+              <a:t>0%</a:t>
+            </a:r>
+          </a:p>
+        </p:txBody>
+      </p:sp>
+      <p:sp>
+        <p:nvSpPr>
+          <p:cNvPr id="6" name="Rounded Rectangle 5"/>
+          <p:cNvSpPr/>
+          <p:nvPr/>
+        </p:nvSpPr>
+        <p:spPr>
+          <a:xfrm>
+            <a:off x="8138160" y="1920240"/>
+            <a:ext cx="3566160" cy="146304"/>
+          </a:xfrm>
+          <a:prstGeom prst="roundRect">
+            <a:avLst/>
+          </a:prstGeom>
+          <a:solidFill>
+            <a:srgbClr val="F2F4F6"/>
+          </a:solidFill>
+          <a:ln>
+            <a:noFill/>
+          </a:ln>
+        </p:spPr>
+        <p:style>
+          <a:lnRef idx="1">
+            <a:schemeClr val="accent1"/>
+          </a:lnRef>
+          <a:fillRef idx="3">
+            <a:schemeClr val="accent1"/>
+          </a:fillRef>
+          <a:effectRef idx="2">
+            <a:schemeClr val="accent1"/>
+          </a:effectRef>
+          <a:fontRef idx="minor">
+            <a:schemeClr val="lt1"/>
+          </a:fontRef>
+        </p:style>
+        <p:txBody>
+          <a:bodyPr rtlCol="0" anchor="ctr"/>
+          <a:lstStyle/>
+          <a:p>
+            <a:pPr algn="ctr"/>
+          </a:p>
+        </p:txBody>
+      </p:sp>
+      <p:sp>
+        <p:nvSpPr>
+          <p:cNvPr id="7" name="TextBox 6"/>
+          <p:cNvSpPr txBox="1"/>
+          <p:nvPr/>
+        </p:nvSpPr>
+        <p:spPr>
+          <a:xfrm>
+            <a:off x="8138160" y="2286000"/>
+            <a:ext cx="3566160" cy="4023360"/>
+          </a:xfrm>
+          <a:prstGeom prst="rect">
+            <a:avLst/>
+          </a:prstGeom>
+          <a:noFill/>
+        </p:spPr>
+        <p:txBody>
+          <a:bodyPr wrap="square" anchor="t">
+            <a:spAutoFit/>
+          </a:bodyPr>
+          <a:lstStyle/>
+          <a:p>
+            <a:pPr algn="l"/>
+            <a:r>
+              <a:rPr sz="1200" b="1">
+                <a:solidFill>
+                  <a:srgbClr val="6357CC"/>
+                </a:solidFill>
+                <a:latin typeface="Hiragino Sans"/>
+                <a:ea typeface="Hiragino Sans"/>
+                <a:cs typeface="Hiragino Sans"/>
+              </a:rPr>
+              <a:t>ゴール</a:t>
+            </a:r>
+          </a:p>
+          <a:p>
+            <a:pPr algn="l"/>
+            <a:r>
+              <a:rPr sz="1300" b="0">
+                <a:solidFill>
+                  <a:srgbClr val="1F2933"/>
+                </a:solidFill>
+                <a:latin typeface="Hiragino Sans"/>
+                <a:ea typeface="Hiragino Sans"/>
+                <a:cs typeface="Hiragino Sans"/>
+              </a:rPr>
+              <a:t>客層を問わず自分の型で契約まで運び、成約が安定する</a:t>
+            </a:r>
+          </a:p>
+          <a:p>
+            <a:pPr algn="l"/>
+            <a:r>
+              <a:rPr sz="1200" b="1">
+                <a:solidFill>
+                  <a:srgbClr val="EF9F27"/>
+                </a:solidFill>
+                <a:latin typeface="Hiragino Sans"/>
+                <a:ea typeface="Hiragino Sans"/>
+                <a:cs typeface="Hiragino Sans"/>
+              </a:rPr>
+              <a:t>今週のフォーカス</a:t>
+            </a:r>
+          </a:p>
+          <a:p>
+            <a:pPr algn="l"/>
+            <a:r>
+              <a:rPr sz="1300" b="0">
+                <a:solidFill>
+                  <a:srgbClr val="1F2933"/>
+                </a:solidFill>
+                <a:latin typeface="Hiragino Sans"/>
+                <a:ea typeface="Hiragino Sans"/>
+                <a:cs typeface="Hiragino Sans"/>
+              </a:rPr>
+              <a:t>まずは現状の勝ち負けを言語化する（①型を知る）</a:t>
+            </a:r>
+          </a:p>
+          <a:p>
+            <a:pPr algn="l"/>
+            <a:r>
+              <a:rPr sz="1200" b="1">
+                <a:solidFill>
+                  <a:srgbClr val="67707A"/>
+                </a:solidFill>
+                <a:latin typeface="Hiragino Sans"/>
+                <a:ea typeface="Hiragino Sans"/>
+                <a:cs typeface="Hiragino Sans"/>
+              </a:rPr>
+              <a:t>ネクストアクション</a:t>
+            </a:r>
+          </a:p>
+          <a:p>
+            <a:pPr algn="l"/>
+            <a:r>
+              <a:rPr sz="1300" b="0">
+                <a:solidFill>
+                  <a:srgbClr val="1F2933"/>
+                </a:solidFill>
+                <a:latin typeface="Hiragino Sans"/>
+                <a:ea typeface="Hiragino Sans"/>
+                <a:cs typeface="Hiragino Sans"/>
+              </a:rPr>
+              <a:t>②練習へ：苦手ケースの切り返しをロープレ</a:t>
             </a:r>
           </a:p>
         </p:txBody>

--- a/tools/goalmap/out/週次ゴール進捗_2026-W26.pptx
+++ b/tools/goalmap/out/週次ゴール進捗_2026-W26.pptx
@@ -4119,7 +4119,7 @@
                 <a:ea typeface="Hiragino Sans"/>
                 <a:cs typeface="Hiragino Sans"/>
               </a:rPr>
-              <a:t>15%</a:t>
+              <a:t>13%</a:t>
             </a:r>
           </a:p>
         </p:txBody>
@@ -4176,7 +4176,7 @@
         <p:spPr>
           <a:xfrm>
             <a:off x="8503920" y="4005072"/>
-            <a:ext cx="315468" cy="146304"/>
+            <a:ext cx="273405" cy="146304"/>
           </a:xfrm>
           <a:prstGeom prst="roundRect">
             <a:avLst/>
@@ -4840,7 +4840,7 @@
       </p:sp>
       <p:pic>
         <p:nvPicPr>
-          <p:cNvPr id="3" name="Picture 2" descr="tmpratnvufy.png"/>
+          <p:cNvPr id="3" name="Picture 2" descr="tmpj3f84z5w.png"/>
           <p:cNvPicPr>
             <a:picLocks noChangeAspect="1"/>
           </p:cNvPicPr>
@@ -5143,7 +5143,7 @@
       </p:sp>
       <p:pic>
         <p:nvPicPr>
-          <p:cNvPr id="3" name="Picture 2" descr="tmpxbdt9289.png"/>
+          <p:cNvPr id="3" name="Picture 2" descr="tmpelq2xizq.png"/>
           <p:cNvPicPr>
             <a:picLocks noChangeAspect="1"/>
           </p:cNvPicPr>
@@ -5446,7 +5446,7 @@
       </p:sp>
       <p:pic>
         <p:nvPicPr>
-          <p:cNvPr id="3" name="Picture 2" descr="tmp4nso4r0u.png"/>
+          <p:cNvPr id="3" name="Picture 2" descr="tmpt30j1wb5.png"/>
           <p:cNvPicPr>
             <a:picLocks noChangeAspect="1"/>
           </p:cNvPicPr>
@@ -5792,7 +5792,7 @@
       </p:sp>
       <p:pic>
         <p:nvPicPr>
-          <p:cNvPr id="3" name="Picture 2" descr="tmpv2i6zbtj.png"/>
+          <p:cNvPr id="3" name="Picture 2" descr="tmp9eg_fcq4.png"/>
           <p:cNvPicPr>
             <a:picLocks noChangeAspect="1"/>
           </p:cNvPicPr>
@@ -5807,7 +5807,7 @@
         <p:spPr>
           <a:xfrm>
             <a:off x="457200" y="960120"/>
-            <a:ext cx="5777713" cy="5760720"/>
+            <a:ext cx="5486400" cy="5760720"/>
           </a:xfrm>
           <a:prstGeom prst="rect">
             <a:avLst/>
@@ -5883,7 +5883,7 @@
                 <a:ea typeface="Hiragino Sans"/>
                 <a:cs typeface="Hiragino Sans"/>
               </a:rPr>
-              <a:t>15%</a:t>
+              <a:t>13%</a:t>
             </a:r>
           </a:p>
         </p:txBody>
@@ -5940,7 +5940,7 @@
         <p:spPr>
           <a:xfrm>
             <a:off x="8138160" y="1920240"/>
-            <a:ext cx="534924" cy="146304"/>
+            <a:ext cx="463600" cy="146304"/>
           </a:xfrm>
           <a:prstGeom prst="roundRect">
             <a:avLst/>
@@ -6138,7 +6138,7 @@
       </p:sp>
       <p:pic>
         <p:nvPicPr>
-          <p:cNvPr id="3" name="Picture 2" descr="tmppz1bql63.png"/>
+          <p:cNvPr id="3" name="Picture 2" descr="tmp9ta62j_4.png"/>
           <p:cNvPicPr>
             <a:picLocks noChangeAspect="1"/>
           </p:cNvPicPr>
@@ -6441,7 +6441,7 @@
       </p:sp>
       <p:pic>
         <p:nvPicPr>
-          <p:cNvPr id="3" name="Picture 2" descr="tmpluu_r2nc.png"/>
+          <p:cNvPr id="3" name="Picture 2" descr="tmpe7b0xy7o.png"/>
           <p:cNvPicPr>
             <a:picLocks noChangeAspect="1"/>
           </p:cNvPicPr>
@@ -6744,7 +6744,7 @@
       </p:sp>
       <p:pic>
         <p:nvPicPr>
-          <p:cNvPr id="3" name="Picture 2" descr="tmpklm2mhky.png"/>
+          <p:cNvPr id="3" name="Picture 2" descr="tmpbc_q4pbq.png"/>
           <p:cNvPicPr>
             <a:picLocks noChangeAspect="1"/>
           </p:cNvPicPr>
@@ -6759,7 +6759,7 @@
         <p:spPr>
           <a:xfrm>
             <a:off x="457200" y="960120"/>
-            <a:ext cx="6277708" cy="5760720"/>
+            <a:ext cx="5777713" cy="5760720"/>
           </a:xfrm>
           <a:prstGeom prst="rect">
             <a:avLst/>

--- a/tools/goalmap/out/週次ゴール進捗_2026-W26.pptx
+++ b/tools/goalmap/out/週次ゴール進捗_2026-W26.pptx
@@ -4840,7 +4840,7 @@
       </p:sp>
       <p:pic>
         <p:nvPicPr>
-          <p:cNvPr id="3" name="Picture 2" descr="tmpj3f84z5w.png"/>
+          <p:cNvPr id="3" name="Picture 2" descr="tmpjgg6osz3.png"/>
           <p:cNvPicPr>
             <a:picLocks noChangeAspect="1"/>
           </p:cNvPicPr>
@@ -5143,7 +5143,7 @@
       </p:sp>
       <p:pic>
         <p:nvPicPr>
-          <p:cNvPr id="3" name="Picture 2" descr="tmpelq2xizq.png"/>
+          <p:cNvPr id="3" name="Picture 2" descr="tmpb3yyjjb2.png"/>
           <p:cNvPicPr>
             <a:picLocks noChangeAspect="1"/>
           </p:cNvPicPr>
@@ -5446,7 +5446,7 @@
       </p:sp>
       <p:pic>
         <p:nvPicPr>
-          <p:cNvPr id="3" name="Picture 2" descr="tmpt30j1wb5.png"/>
+          <p:cNvPr id="3" name="Picture 2" descr="tmpe0nu5_op.png"/>
           <p:cNvPicPr>
             <a:picLocks noChangeAspect="1"/>
           </p:cNvPicPr>
@@ -5792,7 +5792,7 @@
       </p:sp>
       <p:pic>
         <p:nvPicPr>
-          <p:cNvPr id="3" name="Picture 2" descr="tmp9eg_fcq4.png"/>
+          <p:cNvPr id="3" name="Picture 2" descr="tmpvrqqkest.png"/>
           <p:cNvPicPr>
             <a:picLocks noChangeAspect="1"/>
           </p:cNvPicPr>
@@ -6138,7 +6138,7 @@
       </p:sp>
       <p:pic>
         <p:nvPicPr>
-          <p:cNvPr id="3" name="Picture 2" descr="tmp9ta62j_4.png"/>
+          <p:cNvPr id="3" name="Picture 2" descr="tmp8nn9yunq.png"/>
           <p:cNvPicPr>
             <a:picLocks noChangeAspect="1"/>
           </p:cNvPicPr>
@@ -6441,7 +6441,7 @@
       </p:sp>
       <p:pic>
         <p:nvPicPr>
-          <p:cNvPr id="3" name="Picture 2" descr="tmpe7b0xy7o.png"/>
+          <p:cNvPr id="3" name="Picture 2" descr="tmpwu0ocymf.png"/>
           <p:cNvPicPr>
             <a:picLocks noChangeAspect="1"/>
           </p:cNvPicPr>
@@ -6744,7 +6744,7 @@
       </p:sp>
       <p:pic>
         <p:nvPicPr>
-          <p:cNvPr id="3" name="Picture 2" descr="tmpbc_q4pbq.png"/>
+          <p:cNvPr id="3" name="Picture 2" descr="tmpxwdzr_36.png"/>
           <p:cNvPicPr>
             <a:picLocks noChangeAspect="1"/>
           </p:cNvPicPr>
